--- a/docs/522024320201_张继华_硕士论文正式答辩.pptx
+++ b/docs/522024320201_张继华_硕士论文正式答辩.pptx
@@ -728,10 +728,14 @@
           <a:bodyPr/>
           <a:lstStyle/>
           <a:p>
-            <a:endParaRPr lang="zh-CN" altLang="en-US" sz="900" dirty="0">
-              <a:latin typeface="Microsoft YaHei" panose="020B0503020204020204" pitchFamily="34" charset="-122"/>
-              <a:ea typeface="Microsoft YaHei" panose="020B0503020204020204" pitchFamily="34" charset="-122"/>
-            </a:endParaRPr>
+            <a:r>
+              <a:t>【建议 20s】</a:t>
+            </a:r>
+          </a:p>
+          <a:p>
+            <a:r>
+              <a:t>各位老师好。我是张继华，今天答辩的题目是《支持混合隔离级别的分布式键值数据库原型的设计与实现》。我的导师是葛季栋副教授和魏恒峰特任副研究员。下面开始我的汇报。</a:t>
+            </a:r>
           </a:p>
         </p:txBody>
       </p:sp>
@@ -806,10 +810,14 @@
           <a:bodyPr/>
           <a:lstStyle/>
           <a:p>
-            <a:endParaRPr lang="zh-CN" altLang="en-US" sz="900" dirty="0">
-              <a:latin typeface="Microsoft YaHei" panose="020B0503020204020204" pitchFamily="34" charset="-122"/>
-              <a:ea typeface="Microsoft YaHei" panose="020B0503020204020204" pitchFamily="34" charset="-122"/>
-            </a:endParaRPr>
+            <a:r>
+              <a:t>【建议 40s】</a:t>
+            </a:r>
+          </a:p>
+          <a:p>
+            <a:r>
+              <a:t>本文的核心理论工具是抽象执行模型。一次抽象执行由五个要素组成：事务集合 T，会话内严格全序 PO，隔离级别函数 level，可见性偏序 VIS，仲裁全序 AR。关键性质是：若两个事务存在可见性关系，那么在仲裁顺序中必须保持同样的先后。本文的关键扩展在 level 函数——它允许同一执行历史中的不同事务映射到不同隔离级别，从而把混合隔离纳入统一描述。</a:t>
+            </a:r>
           </a:p>
         </p:txBody>
       </p:sp>
@@ -896,10 +904,14 @@
           <a:bodyPr/>
           <a:lstStyle/>
           <a:p>
-            <a:endParaRPr lang="zh-CN" altLang="en-US" sz="900" dirty="0">
-              <a:latin typeface="Microsoft YaHei" panose="020B0503020204020204" pitchFamily="34" charset="-122"/>
-              <a:ea typeface="Microsoft YaHei" panose="020B0503020204020204" pitchFamily="34" charset="-122"/>
-            </a:endParaRPr>
+            <a:r>
+              <a:t>【建议 15s】</a:t>
+            </a:r>
+          </a:p>
+          <a:p>
+            <a:r>
+              <a:t>这张图直观展示混合执行：每个事务在自己对应的隔离级别下检查公理，而不是所有事务共享一套约束。</a:t>
+            </a:r>
           </a:p>
         </p:txBody>
       </p:sp>
@@ -974,10 +986,14 @@
           <a:bodyPr/>
           <a:lstStyle/>
           <a:p>
-            <a:endParaRPr lang="zh-CN" altLang="en-US" sz="900">
-              <a:latin typeface="Microsoft YaHei" panose="020B0503020204020204" pitchFamily="34" charset="-122"/>
-              <a:ea typeface="Microsoft YaHei" panose="020B0503020204020204" pitchFamily="34" charset="-122"/>
-            </a:endParaRPr>
+            <a:r>
+              <a:t>【建议 30s】</a:t>
+            </a:r>
+          </a:p>
+          <a:p>
+            <a:r>
+              <a:t>混合判定分两层：先在微观层定义“抽象执行的一致性”——每个事务在自己 level(t) 对应的公理集合下满足约束；再在宏观层推导“历史的一致性”——整个执行历史能映射到一个满足局部一致性的抽象执行。这一分层定义是后续操作语义设计的语义基础。</a:t>
+            </a:r>
           </a:p>
         </p:txBody>
       </p:sp>
@@ -1075,10 +1091,14 @@
           <a:bodyPr/>
           <a:lstStyle/>
           <a:p>
-            <a:endParaRPr kumimoji="1" lang="zh-CN" altLang="en-US" sz="900" dirty="0">
-              <a:latin typeface="Microsoft YaHei" panose="020B0503020204020204" pitchFamily="34" charset="-122"/>
-              <a:ea typeface="Microsoft YaHei" panose="020B0503020204020204" pitchFamily="34" charset="-122"/>
-            </a:endParaRPr>
+            <a:r>
+              <a:t>【建议 5s】</a:t>
+            </a:r>
+          </a:p>
+          <a:p>
+            <a:r>
+              <a:t>下面进入第三部分，操作语义设计与 TLA+ 验证。</a:t>
+            </a:r>
           </a:p>
         </p:txBody>
       </p:sp>
@@ -1164,10 +1184,14 @@
           <a:bodyPr/>
           <a:lstStyle/>
           <a:p>
-            <a:endParaRPr lang="zh-CN" altLang="en-US" sz="900">
-              <a:latin typeface="Microsoft YaHei" panose="020B0503020204020204" pitchFamily="34" charset="-122"/>
-              <a:ea typeface="Microsoft YaHei" panose="020B0503020204020204" pitchFamily="34" charset="-122"/>
-            </a:endParaRPr>
+            <a:r>
+              <a:t>【建议 20s】</a:t>
+            </a:r>
+          </a:p>
+          <a:p>
+            <a:r>
+              <a:t>全局定序采用混合逻辑时钟 HLC。HLC 同时维护物理时钟 wall 和逻辑计数器 logical，既保留物理时钟的大致全局顺序，又用逻辑计数器解决时钟回拨和同步误差，保证时间戳全局唯一且具有因果一致性。</a:t>
+            </a:r>
           </a:p>
         </p:txBody>
       </p:sp>
@@ -1247,10 +1271,14 @@
           <a:bodyPr/>
           <a:lstStyle/>
           <a:p>
-            <a:endParaRPr lang="zh-CN" altLang="en-US" sz="900">
-              <a:latin typeface="Microsoft YaHei" panose="020B0503020204020204" pitchFamily="34" charset="-122"/>
-              <a:ea typeface="Microsoft YaHei" panose="020B0503020204020204" pitchFamily="34" charset="-122"/>
-            </a:endParaRPr>
+            <a:r>
+              <a:t>【建议 10s】</a:t>
+            </a:r>
+          </a:p>
+          <a:p>
+            <a:r>
+              <a:t>在 HLC 与 MVCC 基础上，本文设计了一套与抽象执行对应的操作语义，覆盖 StartTx、ExecuteOp、CommitTx 与跨分片协调流程。</a:t>
+            </a:r>
           </a:p>
         </p:txBody>
       </p:sp>
@@ -1330,10 +1358,14 @@
           <a:bodyPr/>
           <a:lstStyle/>
           <a:p>
-            <a:endParaRPr lang="zh-CN" altLang="en-US" sz="900">
-              <a:latin typeface="Microsoft YaHei" panose="020B0503020204020204" pitchFamily="34" charset="-122"/>
-              <a:ea typeface="Microsoft YaHei" panose="020B0503020204020204" pitchFamily="34" charset="-122"/>
-            </a:endParaRPr>
+            <a:r>
+              <a:t>【建议 30s】</a:t>
+            </a:r>
+          </a:p>
+          <a:p>
+            <a:r>
+              <a:t>不同隔离级别有差异化定制。PC 前缀一致性：读请求若遇到 prepare_time ≤ snapshot_time 的预提交事务，必须等待其提交或中止，以保证读到连续前缀。CC 因果一致性：事务快照不取当前时间，而继承客户端维护的依赖时间戳 dep，从而满足 Session 和 TransVis。</a:t>
+            </a:r>
           </a:p>
         </p:txBody>
       </p:sp>
@@ -1413,10 +1445,14 @@
           <a:bodyPr/>
           <a:lstStyle/>
           <a:p>
-            <a:endParaRPr lang="zh-CN" altLang="en-US" sz="900">
-              <a:latin typeface="Microsoft YaHei" panose="020B0503020204020204" pitchFamily="34" charset="-122"/>
-              <a:ea typeface="Microsoft YaHei" panose="020B0503020204020204" pitchFamily="34" charset="-122"/>
-            </a:endParaRPr>
+            <a:r>
+              <a:t>【建议 30s】</a:t>
+            </a:r>
+          </a:p>
+          <a:p>
+            <a:r>
+              <a:t>PSI、SI、SER 三个更强级别的冲突解决：PSI/SI 采用延迟加锁——执行阶段写到私有缓冲，提交阶段检查 sts 到 cts 区间是否有其他事务修改同 Key，冲突则 abort。SER 在 SI 基础上增加 S2PL，读取共享锁、写入独占锁并验证读集，同时阻止写写和读写冲突。跨分片事务统一通过两阶段提交保证原子性。</a:t>
+            </a:r>
           </a:p>
         </p:txBody>
       </p:sp>
@@ -1496,10 +1532,14 @@
           <a:bodyPr/>
           <a:lstStyle/>
           <a:p>
-            <a:endParaRPr lang="zh-CN" altLang="en-US" sz="900">
-              <a:latin typeface="Microsoft YaHei" panose="020B0503020204020204" pitchFamily="34" charset="-122"/>
-              <a:ea typeface="Microsoft YaHei" panose="020B0503020204020204" pitchFamily="34" charset="-122"/>
-            </a:endParaRPr>
+            <a:r>
+              <a:t>【建议 15s】</a:t>
+            </a:r>
+          </a:p>
+          <a:p>
+            <a:r>
+              <a:t>为验证操作语义的正确性，本文用 TLA+ 形式化建模，Spec 描述行为约束、cfg 配置参数，用 TLC 在有限状态空间内验证隔离级别承诺、跨分片原子性、可见性传递等关键安全性质。</a:t>
+            </a:r>
           </a:p>
         </p:txBody>
       </p:sp>
@@ -1597,10 +1637,14 @@
           <a:bodyPr/>
           <a:lstStyle/>
           <a:p>
-            <a:endParaRPr kumimoji="1" lang="zh-CN" altLang="en-US" sz="900" dirty="0">
-              <a:latin typeface="Microsoft YaHei" panose="020B0503020204020204" pitchFamily="34" charset="-122"/>
-              <a:ea typeface="Microsoft YaHei" panose="020B0503020204020204" pitchFamily="34" charset="-122"/>
-            </a:endParaRPr>
+            <a:r>
+              <a:t>【建议 5s】</a:t>
+            </a:r>
+          </a:p>
+          <a:p>
+            <a:r>
+              <a:t>下面是原型系统的设计与实现。</a:t>
+            </a:r>
           </a:p>
         </p:txBody>
       </p:sp>
@@ -1693,13 +1737,14 @@
           <a:bodyPr/>
           <a:lstStyle/>
           <a:p>
-            <a:pPr algn="just"/>
-            <a:endParaRPr lang="zh-CN" altLang="zh-CN" sz="900" kern="100" dirty="0">
-              <a:effectLst/>
-              <a:latin typeface="Microsoft YaHei" panose="020B0503020204020204" pitchFamily="34" charset="-122"/>
-              <a:ea typeface="Microsoft YaHei" panose="020B0503020204020204" pitchFamily="34" charset="-122"/>
-              <a:cs typeface="Times New Roman" panose="02020603050405020304" pitchFamily="18" charset="0"/>
-            </a:endParaRPr>
+            <a:r>
+              <a:t>【建议 15s】</a:t>
+            </a:r>
+          </a:p>
+          <a:p>
+            <a:r>
+              <a:t>汇报分为五个部分：研究背景与问题动机、相关背景知识、操作语义设计与TLA+验证、原型系统实现，以及实验结果与总结展望。前两部分简要交代，后三部分是本文主要工作。</a:t>
+            </a:r>
           </a:p>
         </p:txBody>
       </p:sp>
@@ -1781,10 +1826,14 @@
           <a:bodyPr/>
           <a:lstStyle/>
           <a:p>
-            <a:endParaRPr lang="zh-CN" altLang="en-US" sz="900" dirty="0">
-              <a:latin typeface="Microsoft YaHei" panose="020B0503020204020204" pitchFamily="34" charset="-122"/>
-              <a:ea typeface="Microsoft YaHei" panose="020B0503020204020204" pitchFamily="34" charset="-122"/>
-            </a:endParaRPr>
+            <a:r>
+              <a:t>【建议 25s】</a:t>
+            </a:r>
+          </a:p>
+          <a:p>
+            <a:r>
+              <a:t>理论到工程的关键映射：抽象执行中的 VIS 与 AR 对应实现中的快照时间、版本链与提交顺序；事务历史对应事务元数据、操作日志和读写集；StartTx、ExecuteOp、CommitTx 对应 Router 与 Shard 的处理流程。原型系统不是独立实现，而是形式化模型的工程化落地。</a:t>
+            </a:r>
           </a:p>
         </p:txBody>
       </p:sp>
@@ -1859,10 +1908,14 @@
           <a:bodyPr/>
           <a:lstStyle/>
           <a:p>
-            <a:endParaRPr lang="zh-CN" altLang="en-US" sz="900">
-              <a:latin typeface="Microsoft YaHei" panose="020B0503020204020204" pitchFamily="34" charset="-122"/>
-              <a:ea typeface="Microsoft YaHei" panose="020B0503020204020204" pitchFamily="34" charset="-122"/>
-            </a:endParaRPr>
+            <a:r>
+              <a:t>【建议 25s】</a:t>
+            </a:r>
+          </a:p>
+          <a:p>
+            <a:r>
+              <a:t>原型采用分片架构：Client 发起事务，Router 作为统一入口负责路由与协调，Shard 负责数据存储和事务执行，Config Server 维护分片映射和全局元数据。</a:t>
+            </a:r>
           </a:p>
         </p:txBody>
       </p:sp>
@@ -1942,10 +1995,14 @@
           <a:bodyPr/>
           <a:lstStyle/>
           <a:p>
-            <a:endParaRPr lang="zh-CN" altLang="en-US" sz="900">
-              <a:latin typeface="Microsoft YaHei" panose="020B0503020204020204" pitchFamily="34" charset="-122"/>
-              <a:ea typeface="Microsoft YaHei" panose="020B0503020204020204" pitchFamily="34" charset="-122"/>
-            </a:endParaRPr>
+            <a:r>
+              <a:t>【建议 10s】</a:t>
+            </a:r>
+          </a:p>
+          <a:p>
+            <a:r>
+              <a:t>关键点一：长连接配置同步。Router 与 Shard 通过长连接订阅 Config Server 的元数据变更，避免每次请求都拉配置。</a:t>
+            </a:r>
           </a:p>
         </p:txBody>
       </p:sp>
@@ -2025,10 +2082,14 @@
           <a:bodyPr/>
           <a:lstStyle/>
           <a:p>
-            <a:endParaRPr lang="zh-CN" altLang="en-US" sz="900">
-              <a:latin typeface="Microsoft YaHei" panose="020B0503020204020204" pitchFamily="34" charset="-122"/>
-              <a:ea typeface="Microsoft YaHei" panose="020B0503020204020204" pitchFamily="34" charset="-122"/>
-            </a:endParaRPr>
+            <a:r>
+              <a:t>【建议 15s】</a:t>
+            </a:r>
+          </a:p>
+          <a:p>
+            <a:r>
+              <a:t>关键点二：2PC 空洞消除。传统两阶段提交存在协调者宕机后参与者状态不可判的窗口，本文通过事务状态持久化加超时探测消除了这个空洞。</a:t>
+            </a:r>
           </a:p>
         </p:txBody>
       </p:sp>
@@ -2108,10 +2169,14 @@
           <a:bodyPr/>
           <a:lstStyle/>
           <a:p>
-            <a:endParaRPr lang="zh-CN" altLang="en-US" sz="900">
-              <a:latin typeface="Microsoft YaHei" panose="020B0503020204020204" pitchFamily="34" charset="-122"/>
-              <a:ea typeface="Microsoft YaHei" panose="020B0503020204020204" pitchFamily="34" charset="-122"/>
-            </a:endParaRPr>
+            <a:r>
+              <a:t>【建议 15s】</a:t>
+            </a:r>
+          </a:p>
+          <a:p>
+            <a:r>
+              <a:t>关键点三：单分片事务快速提交。事务只涉及一个 Shard 时跳过两阶段提交走单阶段路径，显著降低延迟。</a:t>
+            </a:r>
           </a:p>
         </p:txBody>
       </p:sp>
@@ -2191,10 +2256,14 @@
           <a:bodyPr/>
           <a:lstStyle/>
           <a:p>
-            <a:endParaRPr lang="zh-CN" altLang="en-US" sz="900" dirty="0">
-              <a:latin typeface="Microsoft YaHei" panose="020B0503020204020204" pitchFamily="34" charset="-122"/>
-              <a:ea typeface="Microsoft YaHei" panose="020B0503020204020204" pitchFamily="34" charset="-122"/>
-            </a:endParaRPr>
+            <a:r>
+              <a:t>【建议 10s】</a:t>
+            </a:r>
+          </a:p>
+          <a:p>
+            <a:r>
+              <a:t>关键点四：客户端连接池，复用 Router 间的 TCP 长连接与 gRPC stream，避免每事务建连。</a:t>
+            </a:r>
           </a:p>
         </p:txBody>
       </p:sp>
@@ -2292,10 +2361,14 @@
           <a:bodyPr/>
           <a:lstStyle/>
           <a:p>
-            <a:endParaRPr kumimoji="1" lang="zh-CN" altLang="en-US" sz="900" dirty="0">
-              <a:latin typeface="Microsoft YaHei" panose="020B0503020204020204" pitchFamily="34" charset="-122"/>
-              <a:ea typeface="Microsoft YaHei" panose="020B0503020204020204" pitchFamily="34" charset="-122"/>
-            </a:endParaRPr>
+            <a:r>
+              <a:t>【建议 5s】</a:t>
+            </a:r>
+          </a:p>
+          <a:p>
+            <a:r>
+              <a:t>最后是实验结果与总结展望。</a:t>
+            </a:r>
           </a:p>
         </p:txBody>
       </p:sp>
@@ -2406,20 +2479,14 @@
           <a:bodyPr/>
           <a:lstStyle/>
           <a:p>
-            <a:pPr marL="0" marR="0" lvl="0" indent="0" algn="l" defTabSz="914400" rtl="0" eaLnBrk="1" fontAlgn="auto" latinLnBrk="0" hangingPunct="1">
-              <a:spcBef>
-                <a:spcPts val="0"/>
-              </a:spcBef>
-              <a:buClrTx/>
-              <a:buSzTx/>
-              <a:buFontTx/>
-              <a:buNone/>
-              <a:defRPr/>
-            </a:pPr>
-            <a:endParaRPr lang="zh-CN" altLang="en-US" sz="900" dirty="0">
-              <a:latin typeface="Microsoft YaHei" panose="020B0503020204020204" pitchFamily="34" charset="-122"/>
-              <a:ea typeface="Microsoft YaHei" panose="020B0503020204020204" pitchFamily="34" charset="-122"/>
-            </a:endParaRPr>
+            <a:r>
+              <a:t>【建议 20s】</a:t>
+            </a:r>
+          </a:p>
+          <a:p>
+            <a:r>
+              <a:t>首先用一组针对性的测试用例验证操作语义的正确性——确认在 PC、CC、PSI、SI、SER 各级别下，系统能够正确禁止对应级别所不允许的异常。这一组实验保证了后续性能对比是在语义正确前提下做的。</a:t>
+            </a:r>
           </a:p>
         </p:txBody>
       </p:sp>
@@ -2512,20 +2579,14 @@
           <a:bodyPr/>
           <a:lstStyle/>
           <a:p>
-            <a:pPr marL="0" marR="0" lvl="0" indent="0" algn="l" defTabSz="914400" rtl="0" eaLnBrk="1" fontAlgn="auto" latinLnBrk="0" hangingPunct="1">
-              <a:spcBef>
-                <a:spcPts val="0"/>
-              </a:spcBef>
-              <a:buClrTx/>
-              <a:buSzTx/>
-              <a:buFontTx/>
-              <a:buNone/>
-              <a:defRPr/>
-            </a:pPr>
-            <a:endParaRPr lang="zh-CN" altLang="en-US" sz="900" dirty="0">
-              <a:latin typeface="Microsoft YaHei" panose="020B0503020204020204" pitchFamily="34" charset="-122"/>
-              <a:ea typeface="Microsoft YaHei" panose="020B0503020204020204" pitchFamily="34" charset="-122"/>
-            </a:endParaRPr>
+            <a:r>
+              <a:t>【建议 35s】</a:t>
+            </a:r>
+          </a:p>
+          <a:p>
+            <a:r>
+              <a:t>性能实验。负载选取 Courseware、SmallBank、TPCC 三组数据集，覆盖不同读写比例、热点分布与冲突特征；部署包括单可用区集中部署和跨可用区分散部署，后者通信开销明显更高。两张图展示两种部署下的吞吐对比——不论哪种部署，MIA 以及在其上引入更细粒度分配的 MIAED 都显著优于统一 SER 基线。</a:t>
+            </a:r>
           </a:p>
         </p:txBody>
       </p:sp>
@@ -2607,10 +2668,14 @@
           <a:bodyPr/>
           <a:lstStyle/>
           <a:p>
-            <a:endParaRPr lang="zh-CN" altLang="en-US" sz="900" dirty="0">
-              <a:latin typeface="Microsoft YaHei" panose="020B0503020204020204" pitchFamily="34" charset="-122"/>
-              <a:ea typeface="Microsoft YaHei" panose="020B0503020204020204" pitchFamily="34" charset="-122"/>
-            </a:endParaRPr>
+            <a:r>
+              <a:t>【建议 30s】</a:t>
+            </a:r>
+          </a:p>
+          <a:p>
+            <a:r>
+              <a:t>具体数字：单可用区下，MIA 后的平均吞吐率从 SER 的 69.36 tx/s 提升到 206.19 tx/s，增幅约 197%；跨可用区下，从 7.13 tx/s 提升到 21.17 tx/s，增幅约 197%。两种部署都达到约两倍的吞吐增长，说明按事务需求分配隔离级别能稳定释放被强同步压制的并发潜力，并且这种优势在协调开销更高的跨可用区场景下依然成立。</a:t>
+            </a:r>
           </a:p>
         </p:txBody>
       </p:sp>
@@ -2685,10 +2750,14 @@
           <a:bodyPr/>
           <a:lstStyle/>
           <a:p>
-            <a:endParaRPr kumimoji="1" lang="zh-CN" altLang="en-US" sz="900" dirty="0">
-              <a:latin typeface="Microsoft YaHei" panose="020B0503020204020204" pitchFamily="34" charset="-122"/>
-              <a:ea typeface="Microsoft YaHei" panose="020B0503020204020204" pitchFamily="34" charset="-122"/>
-            </a:endParaRPr>
+            <a:r>
+              <a:t>【建议 5s】</a:t>
+            </a:r>
+          </a:p>
+          <a:p>
+            <a:r>
+              <a:t>首先是研究背景。</a:t>
+            </a:r>
           </a:p>
         </p:txBody>
       </p:sp>
@@ -2775,10 +2844,14 @@
           <a:bodyPr/>
           <a:lstStyle/>
           <a:p>
-            <a:endParaRPr lang="zh-CN" altLang="en-US" sz="900" dirty="0">
-              <a:latin typeface="Microsoft YaHei" panose="020B0503020204020204" pitchFamily="34" charset="-122"/>
-              <a:ea typeface="Microsoft YaHei" panose="020B0503020204020204" pitchFamily="34" charset="-122"/>
-            </a:endParaRPr>
+            <a:r>
+              <a:t>【建议 25s】</a:t>
+            </a:r>
+          </a:p>
+          <a:p>
+            <a:r>
+              <a:t>本文主要工作三点：一，建立了混合隔离级别下的统一语义框架——抽象执行加分层一致性判定；二，设计了对应的并发控制操作语义，并用 TLA+/TLC 完成形式化建模与模型检查；三，实现了支持四种隔离级别共存的分布式键值数据库原型，实验证明在保证正确性前提下显著提升吞吐。</a:t>
+            </a:r>
           </a:p>
         </p:txBody>
       </p:sp>
@@ -2858,10 +2931,14 @@
           <a:bodyPr/>
           <a:lstStyle/>
           <a:p>
-            <a:endParaRPr lang="zh-CN" altLang="en-US" sz="900" dirty="0">
-              <a:latin typeface="Microsoft YaHei" panose="020B0503020204020204" pitchFamily="34" charset="-122"/>
-              <a:ea typeface="Microsoft YaHei" panose="020B0503020204020204" pitchFamily="34" charset="-122"/>
-            </a:endParaRPr>
+            <a:r>
+              <a:t>【建议 20s】</a:t>
+            </a:r>
+          </a:p>
+          <a:p>
+            <a:r>
+              <a:t>未来工作三个方向：系统评测引入 TPC-C、YCSB 等标准负载并加入持久化机制；工程实现补齐存储引擎、日志恢复、副本复制、动态扩缩容等生产级能力；研究方向探索替代 2PC 的高效跨分片提交协议，以及基于业务特征的隔离级别智能分配方法。</a:t>
+            </a:r>
           </a:p>
         </p:txBody>
       </p:sp>
@@ -2948,10 +3025,14 @@
           <a:bodyPr/>
           <a:lstStyle/>
           <a:p>
-            <a:endParaRPr lang="zh-CN" altLang="en-US" sz="900" dirty="0">
-              <a:latin typeface="Microsoft YaHei" panose="020B0503020204020204" pitchFamily="34" charset="-122"/>
-              <a:ea typeface="Microsoft YaHei" panose="020B0503020204020204" pitchFamily="34" charset="-122"/>
-            </a:endParaRPr>
+            <a:r>
+              <a:t>【建议 10s】</a:t>
+            </a:r>
+          </a:p>
+          <a:p>
+            <a:r>
+              <a:t>我的汇报到这里结束，谢谢各位老师，请老师们批评指正。</a:t>
+            </a:r>
           </a:p>
         </p:txBody>
       </p:sp>
@@ -3033,23 +3114,14 @@
           <a:bodyPr/>
           <a:lstStyle/>
           <a:p>
-            <a:pPr marL="0" marR="0" lvl="0" indent="0" algn="l" defTabSz="914400" rtl="0" eaLnBrk="1" fontAlgn="auto" latinLnBrk="0" hangingPunct="1">
-              <a:spcBef>
-                <a:spcPts val="0"/>
-              </a:spcBef>
-              <a:buClrTx/>
-              <a:buSzTx/>
-              <a:buFontTx/>
-              <a:buNone/>
-              <a:defRPr/>
-            </a:pPr>
-            <a:endParaRPr lang="en-US" altLang="zh-CN" sz="900" dirty="0">
-              <a:solidFill>
-                <a:schemeClr val="tx1"/>
-              </a:solidFill>
-              <a:latin typeface="Microsoft YaHei" panose="020B0503020204020204" pitchFamily="34" charset="-122"/>
-              <a:ea typeface="Microsoft YaHei" panose="020B0503020204020204" pitchFamily="34" charset="-122"/>
-            </a:endParaRPr>
+            <a:r>
+              <a:t>【建议 30s】</a:t>
+            </a:r>
+          </a:p>
+          <a:p>
+            <a:r>
+              <a:t>分布式数据库是高并发互联网业务的核心基础设施。不同事务对一致性和性能的诉求并不一致——金融转账要求强一致，日志统计更看重吞吐。传统做法只能为整个系统选定一个隔离级别：强级别正确但同步开销大，弱级别高效但核心业务有风险。本文要回答三个问题：如何统一刻画多种隔离级别？如何给出可实现、可验证的混合隔离操作语义？如何用原型与实验说明性能意义？</a:t>
+            </a:r>
           </a:p>
         </p:txBody>
       </p:sp>
@@ -3142,10 +3214,14 @@
           <a:bodyPr/>
           <a:lstStyle/>
           <a:p>
-            <a:endParaRPr kumimoji="1" lang="zh-CN" altLang="en-US" sz="900" dirty="0">
-              <a:latin typeface="Microsoft YaHei" panose="020B0503020204020204" pitchFamily="34" charset="-122"/>
-              <a:ea typeface="Microsoft YaHei" panose="020B0503020204020204" pitchFamily="34" charset="-122"/>
-            </a:endParaRPr>
+            <a:r>
+              <a:t>【建议 5s】</a:t>
+            </a:r>
+          </a:p>
+          <a:p>
+            <a:r>
+              <a:t>接下来介绍必要的背景知识。</a:t>
+            </a:r>
           </a:p>
         </p:txBody>
       </p:sp>
@@ -3231,10 +3307,14 @@
           <a:bodyPr/>
           <a:lstStyle/>
           <a:p>
-            <a:endParaRPr lang="zh-CN" altLang="en-US" sz="900">
-              <a:latin typeface="Microsoft YaHei" panose="020B0503020204020204" pitchFamily="34" charset="-122"/>
-              <a:ea typeface="Microsoft YaHei" panose="020B0503020204020204" pitchFamily="34" charset="-122"/>
-            </a:endParaRPr>
+            <a:r>
+              <a:t>【建议 15s】</a:t>
+            </a:r>
+          </a:p>
+          <a:p>
+            <a:r>
+              <a:t>先简单回顾事务异常：脏读、不可重复读、幻读、丢失更新、写偏序等。不同隔离级别本质上就是禁止不同的异常组合。这里只作背景，不展开。</a:t>
+            </a:r>
           </a:p>
         </p:txBody>
       </p:sp>
@@ -3332,10 +3412,14 @@
           <a:bodyPr/>
           <a:lstStyle/>
           <a:p>
-            <a:endParaRPr lang="zh-CN" altLang="en-US" sz="900">
-              <a:latin typeface="Microsoft YaHei" panose="020B0503020204020204" pitchFamily="34" charset="-122"/>
-              <a:ea typeface="Microsoft YaHei" panose="020B0503020204020204" pitchFamily="34" charset="-122"/>
-            </a:endParaRPr>
+            <a:r>
+              <a:t>【建议 25s】</a:t>
+            </a:r>
+          </a:p>
+          <a:p>
+            <a:r>
+              <a:t>比异常更系统的方式是用一致性公理刻画隔离级别。前四条：内部一致性 Int——事务能读到自己之前的写；外部一致性 Ext——读到的外部值来自可见事务中仲裁顺序最新的写入；会话一致性 Session 和可见性传递 TransVis——保证会话内顺序连贯、可见关系具有传递性。</a:t>
+            </a:r>
           </a:p>
         </p:txBody>
       </p:sp>
@@ -3421,10 +3505,14 @@
           <a:bodyPr/>
           <a:lstStyle/>
           <a:p>
-            <a:endParaRPr lang="zh-CN" altLang="en-US" sz="900" dirty="0">
-              <a:latin typeface="Microsoft YaHei" panose="020B0503020204020204" pitchFamily="34" charset="-122"/>
-              <a:ea typeface="Microsoft YaHei" panose="020B0503020204020204" pitchFamily="34" charset="-122"/>
-            </a:endParaRPr>
+            <a:r>
+              <a:t>【建议 20s】</a:t>
+            </a:r>
+          </a:p>
+          <a:p>
+            <a:r>
+              <a:t>剩下三条：无冲突 NoConflict——有写冲突的两事务必须建立可见性顺序；前缀一致性 Prefix——事务看到的历史必须是全局仲裁顺序的连续前缀；完全可见性 TotalVis——所有事务两两可比，构成单一全序。</a:t>
+            </a:r>
           </a:p>
         </p:txBody>
       </p:sp>
@@ -3504,10 +3592,14 @@
           <a:bodyPr/>
           <a:lstStyle/>
           <a:p>
-            <a:endParaRPr lang="zh-CN" altLang="en-US" sz="900">
-              <a:latin typeface="Microsoft YaHei" panose="020B0503020204020204" pitchFamily="34" charset="-122"/>
-              <a:ea typeface="Microsoft YaHei" panose="020B0503020204020204" pitchFamily="34" charset="-122"/>
-            </a:endParaRPr>
+            <a:r>
+              <a:t>【建议 20s】</a:t>
+            </a:r>
+          </a:p>
+          <a:p>
+            <a:r>
+              <a:t>把公理与异常组合，就得到一张隔离级别地图。本文涉及 RA、CC、PC、PSI、SI、SER 六个级别，公理越多越严格。这张表是后续选择隔离级别集合和判定混合执行的依据。</a:t>
+            </a:r>
           </a:p>
         </p:txBody>
       </p:sp>
@@ -8078,7 +8170,7 @@
                   <a:schemeClr val="tx1"/>
                 </a:solidFill>
               </a:rPr>
-              <a:t>2026 </a:t>
+              <a:t xml:space="preserve">2026 </a:t>
             </a:r>
             <a:r>
               <a:rPr lang="zh-CN" altLang="en-US" sz="2000" b="1" dirty="0">
@@ -8086,7 +8178,7 @@
                   <a:schemeClr val="tx1"/>
                 </a:solidFill>
               </a:rPr>
-              <a:t>年 </a:t>
+              <a:t xml:space="preserve">年 </a:t>
             </a:r>
             <a:r>
               <a:rPr lang="en-US" altLang="zh-CN" sz="2000" b="1" dirty="0">
@@ -8094,7 +8186,7 @@
                   <a:schemeClr val="tx1"/>
                 </a:solidFill>
               </a:rPr>
-              <a:t>5 </a:t>
+              <a:t xml:space="preserve">5 </a:t>
             </a:r>
             <a:r>
               <a:rPr lang="zh-CN" altLang="en-US" sz="2000" b="1" dirty="0">
@@ -10107,7 +10199,7 @@
                   <a:cs typeface="Roboto"/>
                   <a:sym typeface="Roboto"/>
                 </a:rPr>
-                <a:t> (PO)</a:t>
+                <a:t xml:space="preserve"> (PO)</a:t>
               </a:r>
               <a:endParaRPr lang="en-US" sz="1000" dirty="0"/>
             </a:p>
@@ -15024,7 +15116,7 @@
                     <a:cs typeface="Roboto"/>
                     <a:sym typeface="Roboto"/>
                   </a:rPr>
-                  <a:t>基于抽象执行模型 </a:t>
+                  <a:t xml:space="preserve">基于抽象执行模型 </a:t>
                 </a:r>
                 <a14:m>
                   <m:oMath xmlns:m="http://schemas.openxmlformats.org/officeDocument/2006/math">
@@ -16171,7 +16263,7 @@
                 <a:cs typeface="Roboto"/>
                 <a:sym typeface="Roboto"/>
               </a:rPr>
-              <a:t> </a:t>
+              <a:t xml:space="preserve"> </a:t>
             </a:r>
             <a:r>
               <a:rPr lang="en-US" sz="1400" b="0" i="0" u="none" strike="noStrike" dirty="0" err="1">
@@ -16195,7 +16287,7 @@
                 <a:cs typeface="Roboto"/>
                 <a:sym typeface="Roboto"/>
               </a:rPr>
-              <a:t> T </a:t>
+              <a:t xml:space="preserve"> T </a:t>
             </a:r>
             <a:r>
               <a:rPr lang="en-US" sz="1400" b="0" i="0" u="none" strike="noStrike" dirty="0" err="1">
@@ -16219,7 +16311,7 @@
                 <a:cs typeface="Roboto"/>
                 <a:sym typeface="Roboto"/>
               </a:rPr>
-              <a:t> RA, CC, SI, SER）。</a:t>
+              <a:t xml:space="preserve"> RA, CC, SI, SER）。</a:t>
             </a:r>
             <a:endParaRPr lang="en-US" sz="1100" dirty="0">
               <a:solidFill>
@@ -16520,7 +16612,7 @@
                     <a:cs typeface="Roboto"/>
                     <a:sym typeface="Roboto"/>
                   </a:rPr>
-                  <a:t>若任意事务 </a:t>
+                  <a:t xml:space="preserve">若任意事务 </a:t>
                 </a:r>
                 <a14:m>
                   <m:oMath xmlns:m="http://schemas.openxmlformats.org/officeDocument/2006/math">
@@ -16579,7 +16671,7 @@
                     <a:cs typeface="Roboto"/>
                     <a:sym typeface="Roboto"/>
                   </a:rPr>
-                  <a:t>∈ T </a:t>
+                  <a:t xml:space="preserve">∈ T </a:t>
                 </a:r>
                 <a:r>
                   <a:rPr lang="en-US" sz="1400" b="0" i="0" u="none" strike="noStrike" dirty="0" err="1">
@@ -16603,7 +16695,7 @@
                     <a:cs typeface="Roboto"/>
                     <a:sym typeface="Roboto"/>
                   </a:rPr>
-                  <a:t> </a:t>
+                  <a:t xml:space="preserve"> </a:t>
                 </a:r>
                 <a14:m>
                   <m:oMath xmlns:m="http://schemas.openxmlformats.org/officeDocument/2006/math">
@@ -16691,7 +16783,7 @@
                     <a:cs typeface="Roboto"/>
                     <a:sym typeface="Roboto"/>
                   </a:rPr>
-                  <a:t> </a:t>
+                  <a:t xml:space="preserve"> </a:t>
                 </a:r>
                 <a:r>
                   <a:rPr lang="en-US" sz="1400" b="0" i="0" u="none" strike="noStrike" dirty="0" err="1">
@@ -17694,7 +17786,7 @@
                     <a:cs typeface="Roboto"/>
                     <a:sym typeface="Roboto"/>
                   </a:rPr>
-                  <a:t>历史 </a:t>
+                  <a:t xml:space="preserve">历史 </a:t>
                 </a:r>
                 <a14:m>
                   <m:oMath xmlns:m="http://schemas.openxmlformats.org/officeDocument/2006/math">
@@ -17722,7 +17814,7 @@
                     <a:cs typeface="Roboto"/>
                     <a:sym typeface="Roboto"/>
                   </a:rPr>
-                  <a:t> </a:t>
+                  <a:t xml:space="preserve"> </a:t>
                 </a:r>
                 <a:r>
                   <a:rPr lang="en-US" sz="1400" b="0" i="0" u="none" strike="noStrike" dirty="0" err="1">
@@ -17746,7 +17838,7 @@
                     <a:cs typeface="Roboto"/>
                     <a:sym typeface="Roboto"/>
                   </a:rPr>
-                  <a:t> </a:t>
+                  <a:t xml:space="preserve"> </a:t>
                 </a:r>
                 <a14:m>
                   <m:oMath xmlns:m="http://schemas.openxmlformats.org/officeDocument/2006/math">
@@ -17774,7 +17866,7 @@
                     <a:cs typeface="Roboto"/>
                     <a:sym typeface="Roboto"/>
                   </a:rPr>
-                  <a:t> </a:t>
+                  <a:t xml:space="preserve"> </a:t>
                 </a:r>
                 <a:r>
                   <a:rPr lang="en-US" sz="1400" b="0" i="0" u="none" strike="noStrike" dirty="0" err="1">
@@ -17798,7 +17890,7 @@
                     <a:cs typeface="Roboto"/>
                     <a:sym typeface="Roboto"/>
                   </a:rPr>
-                  <a:t> </a:t>
+                  <a:t xml:space="preserve"> </a:t>
                 </a:r>
                 <a14:m>
                   <m:oMath xmlns:m="http://schemas.openxmlformats.org/officeDocument/2006/math">
@@ -17838,7 +17930,7 @@
                     <a:cs typeface="Roboto"/>
                     <a:sym typeface="Roboto"/>
                   </a:rPr>
-                  <a:t> </a:t>
+                  <a:t xml:space="preserve"> </a:t>
                 </a:r>
                 <a14:m>
                   <m:oMath xmlns:m="http://schemas.openxmlformats.org/officeDocument/2006/math">
@@ -18320,7 +18412,7 @@
                     <a:cs typeface="Roboto"/>
                     <a:sym typeface="Roboto"/>
                   </a:rPr>
-                  <a:t> </a:t>
+                  <a:t xml:space="preserve"> </a:t>
                 </a:r>
                 <a14:m>
                   <m:oMath xmlns:m="http://schemas.openxmlformats.org/officeDocument/2006/math">
@@ -18372,7 +18464,7 @@
                     <a:cs typeface="Roboto"/>
                     <a:sym typeface="Roboto"/>
                   </a:rPr>
-                  <a:t> </a:t>
+                  <a:t xml:space="preserve"> </a:t>
                 </a:r>
                 <a14:m>
                   <m:oMath xmlns:m="http://schemas.openxmlformats.org/officeDocument/2006/math">
@@ -21414,7 +21506,7 @@
                 <a:cs typeface="Roboto"/>
                 <a:sym typeface="Roboto"/>
               </a:rPr>
-              <a:t> (wall) </a:t>
+              <a:t xml:space="preserve"> (wall) </a:t>
             </a:r>
             <a:r>
               <a:rPr lang="en-US" sz="1500" b="0" i="0" u="none" strike="noStrike" dirty="0" err="1">
@@ -21438,7 +21530,7 @@
                 <a:cs typeface="Roboto"/>
                 <a:sym typeface="Roboto"/>
               </a:rPr>
-              <a:t> (logical)，</a:t>
+              <a:t xml:space="preserve"> (logical)，</a:t>
             </a:r>
             <a:r>
               <a:rPr lang="en-US" sz="1500" b="0" i="0" u="none" strike="noStrike" dirty="0" err="1">
@@ -22387,7 +22479,7 @@
                     <a:cs typeface="Roboto"/>
                     <a:sym typeface="Roboto"/>
                   </a:rPr>
-                  <a:t>- </a:t>
+                  <a:t xml:space="preserve">- </a:t>
                 </a:r>
                 <a:r>
                   <a:rPr lang="en-US" sz="1600" b="1" i="0" u="none" strike="noStrike" dirty="0" err="1">
@@ -22736,7 +22828,7 @@
                     <a:cs typeface="Roboto"/>
                     <a:sym typeface="Roboto"/>
                   </a:rPr>
-                  <a:t>• </a:t>
+                  <a:t xml:space="preserve">• </a:t>
                 </a:r>
                 <a:r>
                   <a:rPr lang="en-US" sz="1400" b="0" i="0" u="none" strike="noStrike" dirty="0" err="1">
@@ -22812,7 +22904,7 @@
                     <a:cs typeface="Roboto"/>
                     <a:sym typeface="Roboto"/>
                   </a:rPr>
-                  <a:t> </a:t>
+                  <a:t xml:space="preserve"> </a:t>
                 </a:r>
                 <a14:m>
                   <m:oMath xmlns:m="http://schemas.openxmlformats.org/officeDocument/2006/math">
@@ -22840,7 +22932,7 @@
                     <a:cs typeface="Roboto"/>
                     <a:sym typeface="Roboto"/>
                   </a:rPr>
-                  <a:t> 为 </a:t>
+                  <a:t xml:space="preserve"> 为 </a:t>
                 </a:r>
                 <a14:m>
                   <m:oMath xmlns:m="http://schemas.openxmlformats.org/officeDocument/2006/math">
@@ -22880,7 +22972,7 @@
                     <a:cs typeface="Roboto"/>
                     <a:sym typeface="Roboto"/>
                   </a:rPr>
-                  <a:t> </a:t>
+                  <a:t xml:space="preserve"> </a:t>
                 </a:r>
                 <a14:m>
                   <m:oMath xmlns:m="http://schemas.openxmlformats.org/officeDocument/2006/math">
@@ -22908,7 +23000,7 @@
                     <a:cs typeface="Roboto"/>
                     <a:sym typeface="Roboto"/>
                   </a:rPr>
-                  <a:t> </a:t>
+                  <a:t xml:space="preserve"> </a:t>
                 </a:r>
                 <a:r>
                   <a:rPr lang="en-US" sz="1400" b="0" i="0" u="none" strike="noStrike" dirty="0" err="1">
@@ -22932,7 +23024,7 @@
                     <a:cs typeface="Roboto"/>
                     <a:sym typeface="Roboto"/>
                   </a:rPr>
-                  <a:t> 0。</a:t>
+                  <a:t xml:space="preserve"> 0。</a:t>
                 </a:r>
                 <a:endParaRPr lang="en-US" sz="1100" dirty="0">
                   <a:latin typeface="+mj-ea"/>
@@ -22955,7 +23047,7 @@
                     <a:cs typeface="Roboto"/>
                     <a:sym typeface="Roboto"/>
                   </a:rPr>
-                  <a:t>• </a:t>
+                  <a:t xml:space="preserve">• </a:t>
                 </a:r>
                 <a:r>
                   <a:rPr lang="en-US" sz="1400" b="0" i="0" u="none" strike="noStrike" dirty="0" err="1">
@@ -22995,7 +23087,7 @@
                     <a:cs typeface="Roboto"/>
                     <a:sym typeface="Roboto"/>
                   </a:rPr>
-                  <a:t> </a:t>
+                  <a:t xml:space="preserve"> </a:t>
                 </a:r>
                 <a:r>
                   <a:rPr lang="en-US" sz="1400" b="0" i="0" u="none" strike="noStrike" dirty="0" err="1">
@@ -23035,7 +23127,7 @@
                     <a:cs typeface="Roboto"/>
                     <a:sym typeface="Roboto"/>
                   </a:rPr>
-                  <a:t> </a:t>
+                  <a:t xml:space="preserve"> </a:t>
                 </a:r>
                 <a:r>
                   <a:rPr lang="en-US" sz="1400" b="0" i="0" u="none" strike="noStrike" dirty="0" err="1">
@@ -23059,7 +23151,7 @@
                     <a:cs typeface="Roboto"/>
                     <a:sym typeface="Roboto"/>
                   </a:rPr>
-                  <a:t> 1。最终返回 </a:t>
+                  <a:t xml:space="preserve"> 1。最终返回 </a:t>
                 </a:r>
                 <a14:m>
                   <m:oMath xmlns:m="http://schemas.openxmlformats.org/officeDocument/2006/math">
@@ -23756,7 +23848,7 @@
                     <a:cs typeface="Roboto"/>
                     <a:sym typeface="Roboto"/>
                   </a:rPr>
-                  <a:t>2. </a:t>
+                  <a:t xml:space="preserve">2. </a:t>
                 </a:r>
                 <a14:m>
                   <m:oMath xmlns:m="http://schemas.openxmlformats.org/officeDocument/2006/math">
@@ -23844,7 +23936,7 @@
                     <a:cs typeface="Roboto"/>
                     <a:sym typeface="Roboto"/>
                   </a:rPr>
-                  <a:t>- </a:t>
+                  <a:t xml:space="preserve">- </a:t>
                 </a:r>
                 <a:r>
                   <a:rPr lang="en-US" sz="1600" b="1" i="0" u="none" strike="noStrike" dirty="0" err="1">
@@ -24193,7 +24285,7 @@
                     <a:cs typeface="Roboto"/>
                     <a:sym typeface="Roboto"/>
                   </a:rPr>
-                  <a:t>• </a:t>
+                  <a:t xml:space="preserve">• </a:t>
                 </a:r>
                 <a:r>
                   <a:rPr lang="en-US" sz="1400" b="0" i="0" u="none" strike="noStrike" dirty="0" err="1">
@@ -24217,7 +24309,7 @@
                     <a:cs typeface="Roboto"/>
                     <a:sym typeface="Roboto"/>
                   </a:rPr>
-                  <a:t> </a:t>
+                  <a:t xml:space="preserve"> </a:t>
                 </a:r>
                 <a14:m>
                   <m:oMath xmlns:m="http://schemas.openxmlformats.org/officeDocument/2006/math">
@@ -24245,7 +24337,7 @@
                     <a:cs typeface="Roboto"/>
                     <a:sym typeface="Roboto"/>
                   </a:rPr>
-                  <a:t> </a:t>
+                  <a:t xml:space="preserve"> </a:t>
                 </a:r>
                 <a:r>
                   <a:rPr lang="en-US" sz="1400" b="0" i="0" u="none" strike="noStrike" dirty="0" err="1">
@@ -24443,7 +24535,7 @@
                     <a:cs typeface="Roboto"/>
                     <a:sym typeface="Roboto"/>
                   </a:rPr>
-                  <a:t>• </a:t>
+                  <a:t xml:space="preserve">• </a:t>
                 </a:r>
                 <a:r>
                   <a:rPr lang="en-US" sz="1400" b="0" i="0" u="none" strike="noStrike" dirty="0" err="1">
@@ -24467,7 +24559,7 @@
                     <a:cs typeface="Roboto"/>
                     <a:sym typeface="Roboto"/>
                   </a:rPr>
-                  <a:t> </a:t>
+                  <a:t xml:space="preserve"> </a:t>
                 </a:r>
                 <a14:m>
                   <m:oMath xmlns:m="http://schemas.openxmlformats.org/officeDocument/2006/math">
@@ -24495,7 +24587,7 @@
                     <a:cs typeface="Roboto"/>
                     <a:sym typeface="Roboto"/>
                   </a:rPr>
-                  <a:t> </a:t>
+                  <a:t xml:space="preserve"> </a:t>
                 </a:r>
                 <a:r>
                   <a:rPr lang="en-US" sz="1400" b="0" i="0" u="none" strike="noStrike" dirty="0" err="1">
@@ -24535,7 +24627,7 @@
                     <a:cs typeface="Roboto"/>
                     <a:sym typeface="Roboto"/>
                   </a:rPr>
-                  <a:t> 置 0；若等于旧 </a:t>
+                  <a:t xml:space="preserve"> 置 0；若等于旧 </a:t>
                 </a:r>
                 <a14:m>
                   <m:oMath xmlns:m="http://schemas.openxmlformats.org/officeDocument/2006/math">
@@ -24611,7 +24703,7 @@
                     <a:cs typeface="Roboto"/>
                     <a:sym typeface="Roboto"/>
                   </a:rPr>
-                  <a:t> </a:t>
+                  <a:t xml:space="preserve"> </a:t>
                 </a:r>
                 <a14:m>
                   <m:oMath xmlns:m="http://schemas.openxmlformats.org/officeDocument/2006/math">
@@ -24711,7 +24803,7 @@
                     <a:cs typeface="Roboto"/>
                     <a:sym typeface="Roboto"/>
                   </a:rPr>
-                  <a:t> 1。</a:t>
+                  <a:t xml:space="preserve"> 1。</a:t>
                 </a:r>
               </a:p>
             </p:txBody>
@@ -25265,7 +25357,7 @@
                   <a:srgbClr val="7030A0"/>
                 </a:solidFill>
               </a:rPr>
-              <a:t>不是简单取当前时间，而是让事务继承客户端维护的依赖时间戳 </a:t>
+              <a:t xml:space="preserve">不是简单取当前时间，而是让事务继承客户端维护的依赖时间戳 </a:t>
             </a:r>
             <a:r>
               <a:rPr lang="en-US" altLang="zh-CN" sz="1400" dirty="0">
@@ -25273,7 +25365,7 @@
                   <a:srgbClr val="7030A0"/>
                 </a:solidFill>
               </a:rPr>
-              <a:t>dep </a:t>
+              <a:t xml:space="preserve">dep </a:t>
             </a:r>
             <a:r>
               <a:rPr lang="zh-CN" altLang="en-US" sz="1400" dirty="0">
@@ -25281,7 +25373,7 @@
                   <a:srgbClr val="7030A0"/>
                 </a:solidFill>
               </a:rPr>
-              <a:t>作为快照起点，从而保证 </a:t>
+              <a:t xml:space="preserve">作为快照起点，从而保证 </a:t>
             </a:r>
             <a:r>
               <a:rPr lang="en-US" altLang="zh-CN" sz="1400" dirty="0">
@@ -25289,7 +25381,7 @@
                   <a:srgbClr val="7030A0"/>
                 </a:solidFill>
               </a:rPr>
-              <a:t>Session + </a:t>
+              <a:t xml:space="preserve">Session + </a:t>
             </a:r>
             <a:r>
               <a:rPr lang="en-US" altLang="zh-CN" sz="1400" dirty="0" err="1">
@@ -25386,7 +25478,7 @@
                   <a:srgbClr val="7030A0"/>
                 </a:solidFill>
               </a:rPr>
-              <a:t>读请求如果遇到某个键正被一个 </a:t>
+              <a:t xml:space="preserve">读请求如果遇到某个键正被一个 </a:t>
             </a:r>
             <a:r>
               <a:rPr lang="en-US" altLang="zh-CN" sz="1400" dirty="0" err="1">
@@ -25402,7 +25494,7 @@
                   <a:srgbClr val="7030A0"/>
                 </a:solidFill>
               </a:rPr>
-              <a:t> &lt;= </a:t>
+              <a:t xml:space="preserve"> &lt;= </a:t>
             </a:r>
             <a:r>
               <a:rPr lang="en-US" altLang="zh-CN" sz="1400" dirty="0" err="1">
@@ -25418,7 +25510,7 @@
                   <a:srgbClr val="7030A0"/>
                 </a:solidFill>
               </a:rPr>
-              <a:t> </a:t>
+              <a:t xml:space="preserve"> </a:t>
             </a:r>
             <a:r>
               <a:rPr lang="zh-CN" altLang="en-US" sz="1400" dirty="0">
@@ -27807,7 +27899,7 @@
                 <a:cs typeface="Roboto"/>
                 <a:sym typeface="Roboto"/>
               </a:rPr>
-              <a:t> (SI-S2PL)：</a:t>
+              <a:t xml:space="preserve"> (SI-S2PL)：</a:t>
             </a:r>
             <a:r>
               <a:rPr lang="en-US" sz="1400" b="0" i="0" u="none" strike="noStrike" dirty="0" err="1">
@@ -27870,7 +27962,7 @@
                 <a:cs typeface="Roboto"/>
                 <a:sym typeface="Roboto"/>
               </a:rPr>
-              <a:t> (SI-S2PL)：</a:t>
+              <a:t xml:space="preserve"> (SI-S2PL)：</a:t>
             </a:r>
             <a:r>
               <a:rPr lang="en-US" sz="1400" b="0" i="0" u="none" strike="noStrike" dirty="0" err="1">
@@ -30481,7 +30573,7 @@
             </a:pPr>
             <a:r>
               <a:rPr lang="zh-CN" altLang="en-US" sz="1800" b="1" dirty="0"/>
-              <a:t>操作语义与 </a:t>
+              <a:t xml:space="preserve">操作语义与 </a:t>
             </a:r>
             <a:r>
               <a:rPr lang="en-US" altLang="zh-CN" sz="1800" b="1" dirty="0"/>
@@ -30493,7 +30585,7 @@
             </a:r>
             <a:r>
               <a:rPr lang="en-US" altLang="zh-CN" sz="1800" b="1" dirty="0"/>
-              <a:t> </a:t>
+              <a:t xml:space="preserve"> </a:t>
             </a:r>
             <a:r>
               <a:rPr lang="zh-CN" altLang="en-US" sz="1800" b="1" dirty="0"/>
@@ -30625,14 +30717,14 @@
           <a:lstStyle/>
           <a:p>
             <a:r>
-              <a:rPr lang="en-US" altLang="zh-CN" sz="1200" b="1" dirty="0" err="1">
+              <a:rPr lang="en-US" altLang="zh-CN" sz="1200" b="1" dirty="0">
                 <a:solidFill>
                   <a:schemeClr val="bg1">
                     <a:lumMod val="75000"/>
                   </a:schemeClr>
                 </a:solidFill>
               </a:rPr>
-              <a:t>Semetics&amp;TLA</a:t>
+              <a:t>Semantics&amp;TLA</a:t>
             </a:r>
             <a:r>
               <a:rPr lang="en-US" altLang="zh-CN" sz="1200" b="1" baseline="30000" dirty="0">
@@ -31598,7 +31690,7 @@
                   <a:schemeClr val="tx1"/>
                 </a:solidFill>
               </a:rPr>
-              <a:t>1. VIS / AR -&gt; </a:t>
+              <a:t xml:space="preserve">1. VIS / AR -&gt; </a:t>
             </a:r>
             <a:r>
               <a:rPr lang="zh-CN" altLang="en-US" sz="1500" b="1">
@@ -31621,7 +31713,7 @@
                   <a:schemeClr val="tx1"/>
                 </a:solidFill>
               </a:rPr>
-              <a:t>2. </a:t>
+              <a:t xml:space="preserve">2. </a:t>
             </a:r>
             <a:r>
               <a:rPr lang="zh-CN" altLang="en-US" sz="1500" b="1">
@@ -31629,7 +31721,7 @@
                   <a:schemeClr val="tx1"/>
                 </a:solidFill>
               </a:rPr>
-              <a:t>抽象执行历史 </a:t>
+              <a:t xml:space="preserve">抽象执行历史 </a:t>
             </a:r>
             <a:r>
               <a:rPr lang="en-US" altLang="zh-CN" sz="1500" b="1">
@@ -31637,7 +31729,7 @@
                   <a:schemeClr val="tx1"/>
                 </a:solidFill>
               </a:rPr>
-              <a:t>-&gt; </a:t>
+              <a:t xml:space="preserve">-&gt; </a:t>
             </a:r>
             <a:r>
               <a:rPr lang="zh-CN" altLang="en-US" sz="1500" b="1">
@@ -31660,7 +31752,7 @@
                   <a:schemeClr val="tx1"/>
                 </a:solidFill>
               </a:rPr>
-              <a:t>3. StartTx / ExecuteOp / CommitTx -&gt; Router </a:t>
+              <a:t xml:space="preserve">3. StartTx / ExecuteOp / CommitTx -&gt; Router </a:t>
             </a:r>
             <a:r>
               <a:rPr lang="zh-CN" altLang="en-US" sz="1500" b="1">
@@ -31668,7 +31760,7 @@
                   <a:schemeClr val="tx1"/>
                 </a:solidFill>
               </a:rPr>
-              <a:t>与 </a:t>
+              <a:t xml:space="preserve">与 </a:t>
             </a:r>
             <a:r>
               <a:rPr lang="en-US" altLang="zh-CN" sz="1500" b="1">
@@ -31676,7 +31768,7 @@
                   <a:schemeClr val="tx1"/>
                 </a:solidFill>
               </a:rPr>
-              <a:t>Shard </a:t>
+              <a:t xml:space="preserve">Shard </a:t>
             </a:r>
             <a:r>
               <a:rPr lang="zh-CN" altLang="en-US" sz="1500" b="1">
@@ -31699,7 +31791,7 @@
                   <a:schemeClr val="tx1"/>
                 </a:solidFill>
               </a:rPr>
-              <a:t>4. </a:t>
+              <a:t xml:space="preserve">4. </a:t>
             </a:r>
             <a:r>
               <a:rPr lang="zh-CN" altLang="en-US" sz="1500" b="1">
@@ -31885,7 +31977,10 @@
           <a:bodyPr/>
           <a:lstStyle/>
           <a:p>
-            <a:endParaRPr lang="zh-CN" altLang="en-US"/>
+            <a:r>
+              <a:rPr lang="zh-CN" altLang="en-US" dirty="0"/>
+              <a:t>全局事务初始化时序</a:t>
+            </a:r>
           </a:p>
         </p:txBody>
       </p:sp>
@@ -34063,15 +34158,15 @@
             </a:br>
             <a:r>
               <a:rPr lang="en-US" altLang="zh-CN" dirty="0"/>
-              <a:t>1. </a:t>
+              <a:t xml:space="preserve">1. </a:t>
             </a:r>
             <a:r>
               <a:rPr lang="zh-CN" altLang="en-US" dirty="0"/>
-              <a:t>实验结果表明，经过 </a:t>
+              <a:t xml:space="preserve">实验结果表明，经过 </a:t>
             </a:r>
             <a:r>
               <a:rPr lang="en-US" altLang="zh-CN" dirty="0"/>
-              <a:t>MIA </a:t>
+              <a:t xml:space="preserve">MIA </a:t>
             </a:r>
             <a:r>
               <a:rPr lang="zh-CN" altLang="en-US" dirty="0"/>
@@ -34079,7 +34174,7 @@
             </a:r>
             <a:r>
               <a:rPr lang="en-US" altLang="zh-CN" dirty="0"/>
-              <a:t>MIAED </a:t>
+              <a:t xml:space="preserve">MIAED </a:t>
             </a:r>
             <a:r>
               <a:rPr lang="zh-CN" altLang="en-US" dirty="0"/>
@@ -34089,7 +34184,7 @@
           <a:p>
             <a:r>
               <a:rPr lang="en-US" altLang="zh-CN" dirty="0"/>
-              <a:t>2. </a:t>
+              <a:t xml:space="preserve">2. </a:t>
             </a:r>
             <a:r>
               <a:rPr lang="zh-CN" altLang="en-US" dirty="0"/>
@@ -34105,23 +34200,23 @@
             </a:r>
             <a:r>
               <a:rPr lang="en-US" altLang="zh-CN" dirty="0"/>
-              <a:t> </a:t>
+              <a:t xml:space="preserve"> </a:t>
             </a:r>
             <a:r>
               <a:rPr lang="zh-CN" altLang="en-US" dirty="0"/>
-              <a:t>的平均吞吐率由 </a:t>
+              <a:t xml:space="preserve">的平均吞吐率由 </a:t>
             </a:r>
             <a:r>
               <a:rPr lang="en-US" altLang="zh-CN" dirty="0"/>
-              <a:t>SER </a:t>
+              <a:t xml:space="preserve">SER </a:t>
             </a:r>
             <a:r>
               <a:rPr lang="zh-CN" altLang="en-US" dirty="0"/>
-              <a:t>的 </a:t>
+              <a:t xml:space="preserve">的 </a:t>
             </a:r>
             <a:r>
               <a:rPr lang="en-US" altLang="zh-CN" dirty="0"/>
-              <a:t>69.36 </a:t>
+              <a:t xml:space="preserve">69.36 </a:t>
             </a:r>
             <a:r>
               <a:rPr lang="en-US" altLang="zh-CN" dirty="0" err="1"/>
@@ -34129,15 +34224,15 @@
             </a:r>
             <a:r>
               <a:rPr lang="en-US" altLang="zh-CN" dirty="0"/>
-              <a:t>/s </a:t>
+              <a:t xml:space="preserve">/s </a:t>
             </a:r>
             <a:r>
               <a:rPr lang="zh-CN" altLang="en-US" dirty="0"/>
-              <a:t>提升至 </a:t>
+              <a:t xml:space="preserve">提升至 </a:t>
             </a:r>
             <a:r>
               <a:rPr lang="en-US" altLang="zh-CN" dirty="0"/>
-              <a:t>206.19 </a:t>
+              <a:t xml:space="preserve">206.19 </a:t>
             </a:r>
             <a:r>
               <a:rPr lang="en-US" altLang="zh-CN" dirty="0" err="1"/>
@@ -34149,7 +34244,7 @@
             </a:r>
             <a:r>
               <a:rPr lang="zh-CN" altLang="en-US" dirty="0"/>
-              <a:t>，增幅约 </a:t>
+              <a:t xml:space="preserve">，增幅约 </a:t>
             </a:r>
             <a:r>
               <a:rPr lang="en-US" altLang="zh-CN" dirty="0"/>
@@ -34163,7 +34258,7 @@
           <a:p>
             <a:r>
               <a:rPr lang="en-US" altLang="zh-CN" dirty="0"/>
-              <a:t>3. </a:t>
+              <a:t xml:space="preserve">3. </a:t>
             </a:r>
             <a:r>
               <a:rPr lang="zh-CN" altLang="en-US" dirty="0"/>
@@ -34179,23 +34274,23 @@
             </a:r>
             <a:r>
               <a:rPr lang="en-US" altLang="zh-CN" dirty="0"/>
-              <a:t> </a:t>
+              <a:t xml:space="preserve"> </a:t>
             </a:r>
             <a:r>
               <a:rPr lang="zh-CN" altLang="en-US" dirty="0"/>
-              <a:t>的平均吞吐率由 </a:t>
+              <a:t xml:space="preserve">的平均吞吐率由 </a:t>
             </a:r>
             <a:r>
               <a:rPr lang="en-US" altLang="zh-CN" dirty="0"/>
-              <a:t>SER </a:t>
+              <a:t xml:space="preserve">SER </a:t>
             </a:r>
             <a:r>
               <a:rPr lang="zh-CN" altLang="en-US" dirty="0"/>
-              <a:t>的 </a:t>
+              <a:t xml:space="preserve">的 </a:t>
             </a:r>
             <a:r>
               <a:rPr lang="en-US" altLang="zh-CN" dirty="0"/>
-              <a:t>7.13 </a:t>
+              <a:t xml:space="preserve">7.13 </a:t>
             </a:r>
             <a:r>
               <a:rPr lang="en-US" altLang="zh-CN" dirty="0" err="1"/>
@@ -34203,15 +34298,15 @@
             </a:r>
             <a:r>
               <a:rPr lang="en-US" altLang="zh-CN" dirty="0"/>
-              <a:t>/s </a:t>
+              <a:t xml:space="preserve">/s </a:t>
             </a:r>
             <a:r>
               <a:rPr lang="zh-CN" altLang="en-US" dirty="0"/>
-              <a:t>提升至 </a:t>
+              <a:t xml:space="preserve">提升至 </a:t>
             </a:r>
             <a:r>
               <a:rPr lang="en-US" altLang="zh-CN" dirty="0"/>
-              <a:t>21.17 </a:t>
+              <a:t xml:space="preserve">21.17 </a:t>
             </a:r>
             <a:r>
               <a:rPr lang="en-US" altLang="zh-CN" dirty="0" err="1"/>
@@ -34223,7 +34318,7 @@
             </a:r>
             <a:r>
               <a:rPr lang="zh-CN" altLang="en-US" dirty="0"/>
-              <a:t>，增幅约 </a:t>
+              <a:t xml:space="preserve">，增幅约 </a:t>
             </a:r>
             <a:r>
               <a:rPr lang="en-US" altLang="zh-CN" dirty="0"/>
@@ -34290,7 +34385,7 @@
                   <a:srgbClr val="870078"/>
                 </a:solidFill>
               </a:rPr>
-              <a:t>经过 </a:t>
+              <a:t xml:space="preserve">经过 </a:t>
             </a:r>
             <a:r>
               <a:rPr lang="en-US" altLang="zh-CN" dirty="0">
@@ -34298,7 +34393,7 @@
                   <a:srgbClr val="870078"/>
                 </a:solidFill>
               </a:rPr>
-              <a:t>MIA </a:t>
+              <a:t xml:space="preserve">MIA </a:t>
             </a:r>
             <a:r>
               <a:rPr lang="zh-CN" altLang="en-US" dirty="0">
@@ -34337,7 +34432,7 @@
                   <a:srgbClr val="870078"/>
                 </a:solidFill>
               </a:rPr>
-              <a:t>在单可用区和跨可用区两种部署方式下， </a:t>
+              <a:t xml:space="preserve">在单可用区和跨可用区两种部署方式下， </a:t>
             </a:r>
             <a:r>
               <a:rPr lang="en-US" altLang="zh-CN" dirty="0">
@@ -34361,7 +34456,7 @@
                   <a:srgbClr val="870078"/>
                 </a:solidFill>
               </a:rPr>
-              <a:t> </a:t>
+              <a:t xml:space="preserve"> </a:t>
             </a:r>
             <a:r>
               <a:rPr lang="zh-CN" altLang="en-US" dirty="0">
@@ -34369,7 +34464,7 @@
                   <a:srgbClr val="870078"/>
                 </a:solidFill>
               </a:rPr>
-              <a:t>相比单一 </a:t>
+              <a:t xml:space="preserve">相比单一 </a:t>
             </a:r>
             <a:r>
               <a:rPr lang="en-US" altLang="zh-CN" dirty="0">
@@ -34377,7 +34472,7 @@
                   <a:srgbClr val="870078"/>
                 </a:solidFill>
               </a:rPr>
-              <a:t>SER </a:t>
+              <a:t xml:space="preserve">SER </a:t>
             </a:r>
             <a:r>
               <a:rPr lang="zh-CN" altLang="en-US" dirty="0">
@@ -34385,7 +34480,7 @@
                   <a:srgbClr val="870078"/>
                 </a:solidFill>
               </a:rPr>
-              <a:t>策略均实现了约 </a:t>
+              <a:t xml:space="preserve">策略均实现了约 </a:t>
             </a:r>
             <a:r>
               <a:rPr lang="en-US" altLang="zh-CN" dirty="0">
@@ -34393,7 +34488,7 @@
                   <a:srgbClr val="870078"/>
                 </a:solidFill>
               </a:rPr>
-              <a:t>2 </a:t>
+              <a:t xml:space="preserve">2 </a:t>
             </a:r>
             <a:r>
               <a:rPr lang="zh-CN" altLang="en-US" dirty="0">
@@ -36889,7 +36984,7 @@
                 <a:cs typeface="+mn-cs"/>
                 <a:sym typeface="Roboto"/>
               </a:rPr>
-              <a:t> TLA+ </a:t>
+              <a:t xml:space="preserve"> TLA+ </a:t>
             </a:r>
             <a:r>
               <a:rPr lang="en-US" sz="1800" dirty="0" err="1">
@@ -37811,7 +37906,7 @@
                 <a:cs typeface="+mn-cs"/>
                 <a:sym typeface="Roboto"/>
               </a:rPr>
-              <a:t> KV </a:t>
+              <a:t xml:space="preserve"> KV </a:t>
             </a:r>
             <a:r>
               <a:rPr lang="en-US" sz="1800" dirty="0" err="1">
@@ -39715,7 +39810,7 @@
                 <a:cs typeface="+mn-cs"/>
                 <a:sym typeface="Roboto"/>
               </a:rPr>
-              <a:t> TPC-C、YCSB </a:t>
+              <a:t xml:space="preserve"> TPC-C、YCSB </a:t>
             </a:r>
             <a:r>
               <a:rPr lang="en-US" sz="1800" dirty="0" err="1">
@@ -40975,7 +41070,7 @@
                 <a:cs typeface="+mn-cs"/>
                 <a:sym typeface="Roboto"/>
               </a:rPr>
-              <a:t> 2PC </a:t>
+              <a:t xml:space="preserve"> 2PC </a:t>
             </a:r>
             <a:r>
               <a:rPr lang="en-US" sz="1800" dirty="0" err="1">
@@ -44944,7 +45039,7 @@
                 <a:latin typeface="+mn-ea"/>
                 <a:sym typeface="等线" panose="02010600030101010101" pitchFamily="2" charset="-122"/>
               </a:rPr>
-              <a:t>1. </a:t>
+              <a:t xml:space="preserve">1. </a:t>
             </a:r>
             <a:r>
               <a:rPr lang="zh-CN" altLang="en-US" sz="1500" b="1" dirty="0">
@@ -44971,7 +45066,7 @@
                 <a:latin typeface="+mn-ea"/>
                 <a:sym typeface="等线" panose="02010600030101010101" pitchFamily="2" charset="-122"/>
               </a:rPr>
-              <a:t>2. </a:t>
+              <a:t xml:space="preserve">2. </a:t>
             </a:r>
             <a:r>
               <a:rPr lang="zh-CN" altLang="en-US" sz="1500" b="1" dirty="0">
@@ -44998,7 +45093,7 @@
                 <a:latin typeface="+mn-ea"/>
                 <a:sym typeface="等线" panose="02010600030101010101" pitchFamily="2" charset="-122"/>
               </a:rPr>
-              <a:t>3. </a:t>
+              <a:t xml:space="preserve">3. </a:t>
             </a:r>
             <a:r>
               <a:rPr lang="zh-CN" altLang="en-US" sz="1500" b="1" dirty="0">
@@ -45080,7 +45175,7 @@
                 <a:latin typeface="+mn-ea"/>
                 <a:sym typeface="等线" panose="02010600030101010101" pitchFamily="2" charset="-122"/>
               </a:rPr>
-              <a:t>1. </a:t>
+              <a:t xml:space="preserve">1. </a:t>
             </a:r>
             <a:r>
               <a:rPr lang="zh-CN" altLang="en-US" sz="1500" b="1" dirty="0">
@@ -45107,7 +45202,7 @@
                 <a:latin typeface="+mn-ea"/>
                 <a:sym typeface="等线" panose="02010600030101010101" pitchFamily="2" charset="-122"/>
               </a:rPr>
-              <a:t>2. </a:t>
+              <a:t xml:space="preserve">2. </a:t>
             </a:r>
             <a:r>
               <a:rPr lang="zh-CN" altLang="en-US" sz="1500" b="1" dirty="0">
@@ -45134,7 +45229,7 @@
                 <a:latin typeface="+mn-ea"/>
                 <a:sym typeface="等线" panose="02010600030101010101" pitchFamily="2" charset="-122"/>
               </a:rPr>
-              <a:t>3. </a:t>
+              <a:t xml:space="preserve">3. </a:t>
             </a:r>
             <a:r>
               <a:rPr lang="zh-CN" altLang="en-US" sz="1500" b="1" dirty="0">
@@ -45216,7 +45311,7 @@
                 <a:latin typeface="+mn-ea"/>
                 <a:sym typeface="等线" panose="02010600030101010101" pitchFamily="2" charset="-122"/>
               </a:rPr>
-              <a:t>1. </a:t>
+              <a:t xml:space="preserve">1. </a:t>
             </a:r>
             <a:r>
               <a:rPr lang="zh-CN" altLang="en-US" sz="1500" b="1" dirty="0">
@@ -45243,7 +45338,7 @@
                 <a:latin typeface="+mn-ea"/>
                 <a:sym typeface="等线" panose="02010600030101010101" pitchFamily="2" charset="-122"/>
               </a:rPr>
-              <a:t>2. </a:t>
+              <a:t xml:space="preserve">2. </a:t>
             </a:r>
             <a:r>
               <a:rPr lang="zh-CN" altLang="en-US" sz="1500" b="1" dirty="0">
@@ -45270,7 +45365,7 @@
                 <a:latin typeface="+mn-ea"/>
                 <a:sym typeface="等线" panose="02010600030101010101" pitchFamily="2" charset="-122"/>
               </a:rPr>
-              <a:t>3. </a:t>
+              <a:t xml:space="preserve">3. </a:t>
             </a:r>
             <a:r>
               <a:rPr lang="zh-CN" altLang="en-US" sz="1500" b="1" dirty="0">
@@ -49864,7 +49959,7 @@
                     <a:cs typeface="Roboto"/>
                     <a:sym typeface="Roboto"/>
                   </a:rPr>
-                  <a:t> </a:t>
+                  <a:t xml:space="preserve"> </a:t>
                 </a:r>
                 <a14:m>
                   <m:oMath xmlns:m="http://schemas.openxmlformats.org/officeDocument/2006/math">
@@ -49923,7 +50018,7 @@
                     <a:cs typeface="Roboto"/>
                     <a:sym typeface="Roboto"/>
                   </a:rPr>
-                  <a:t> 对 </a:t>
+                  <a:t xml:space="preserve"> 对 </a:t>
                 </a:r>
                 <a14:m>
                   <m:oMath xmlns:m="http://schemas.openxmlformats.org/officeDocument/2006/math">
@@ -50041,7 +50136,7 @@
                     <a:cs typeface="Roboto"/>
                     <a:sym typeface="Roboto"/>
                   </a:rPr>
-                  <a:t> </a:t>
+                  <a:t xml:space="preserve"> </a:t>
                 </a:r>
                 <a:r>
                   <a:rPr lang="en-US" sz="1400" b="0" i="0" u="none" strike="noStrike" dirty="0" err="1">
@@ -50065,7 +50160,7 @@
                     <a:cs typeface="Roboto"/>
                     <a:sym typeface="Roboto"/>
                   </a:rPr>
-                  <a:t> </a:t>
+                  <a:t xml:space="preserve"> </a:t>
                 </a:r>
                 <a14:m>
                   <m:oMath xmlns:m="http://schemas.openxmlformats.org/officeDocument/2006/math">
@@ -50124,7 +50219,7 @@
                     <a:cs typeface="Roboto"/>
                     <a:sym typeface="Roboto"/>
                   </a:rPr>
-                  <a:t> </a:t>
+                  <a:t xml:space="preserve"> </a:t>
                 </a:r>
                 <a:r>
                   <a:rPr lang="en-US" sz="1400" b="0" i="0" u="none" strike="noStrike" dirty="0" err="1">
@@ -50148,7 +50243,7 @@
                     <a:cs typeface="Roboto"/>
                     <a:sym typeface="Roboto"/>
                   </a:rPr>
-                  <a:t> </a:t>
+                  <a:t xml:space="preserve"> </a:t>
                 </a:r>
                 <a14:m>
                   <m:oMath xmlns:m="http://schemas.openxmlformats.org/officeDocument/2006/math">
@@ -50207,7 +50302,7 @@
                     <a:cs typeface="Roboto"/>
                     <a:sym typeface="Roboto"/>
                   </a:rPr>
-                  <a:t> </a:t>
+                  <a:t xml:space="preserve"> </a:t>
                 </a:r>
                 <a:r>
                   <a:rPr lang="en-US" sz="1400" b="0" i="0" u="none" strike="noStrike" dirty="0" err="1">
@@ -50231,7 +50326,7 @@
                     <a:cs typeface="Roboto"/>
                     <a:sym typeface="Roboto"/>
                   </a:rPr>
-                  <a:t> </a:t>
+                  <a:t xml:space="preserve"> </a:t>
                 </a:r>
                 <a14:m>
                   <m:oMath xmlns:m="http://schemas.openxmlformats.org/officeDocument/2006/math">
@@ -50290,7 +50385,7 @@
                     <a:cs typeface="Roboto"/>
                     <a:sym typeface="Roboto"/>
                   </a:rPr>
-                  <a:t> </a:t>
+                  <a:t xml:space="preserve"> </a:t>
                 </a:r>
                 <a:r>
                   <a:rPr lang="en-US" sz="1400" b="0" i="0" u="none" strike="noStrike" dirty="0" err="1">

--- a/docs/522024320201_张继华_硕士论文正式答辩.pptx
+++ b/docs/522024320201_张继华_硕士论文正式答辩.pptx
@@ -248,7 +248,7 @@
           <a:p>
             <a:fld id="{0F9B84EA-7D68-4D60-9CB1-D50884785D1C}" type="datetimeFigureOut">
               <a:rPr lang="zh-CN" altLang="en-US" smtClean="0"/>
-              <a:t>2026/5/10</a:t>
+              <a:t>2026/5/22</a:t>
             </a:fld>
             <a:endParaRPr lang="zh-CN" altLang="en-US"/>
           </a:p>
@@ -414,7 +414,7 @@
           <a:p>
             <a:fld id="{D6C8D182-E4C8-4120-9249-FC9774456FFA}" type="datetimeFigureOut">
               <a:rPr lang="zh-CN" altLang="en-US" smtClean="0"/>
-              <a:t>2026/5/10</a:t>
+              <a:t>2026/5/22</a:t>
             </a:fld>
             <a:endParaRPr lang="zh-CN" altLang="en-US"/>
           </a:p>
@@ -729,12 +729,50 @@
           <a:lstStyle/>
           <a:p>
             <a:r>
-              <a:t>【建议 20s】</a:t>
+              <a:rPr dirty="0"/>
+              <a:t>【</a:t>
+            </a:r>
+            <a:r>
+              <a:rPr dirty="0" err="1"/>
+              <a:t>建议</a:t>
+            </a:r>
+            <a:r>
+              <a:rPr dirty="0"/>
+              <a:t> 20s】</a:t>
             </a:r>
           </a:p>
           <a:p>
             <a:r>
-              <a:t>各位老师好。我是张继华，今天答辩的题目是《支持混合隔离级别的分布式键值数据库原型的设计与实现》。我的导师是葛季栋副教授和魏恒峰特任副研究员。下面开始我的汇报。</a:t>
+              <a:rPr dirty="0" err="1"/>
+              <a:t>各位老师好。我是张继华，今天答辩的题目是《支持混合隔离级别的分布式键值数据库原型的设计与实现</a:t>
+            </a:r>
+            <a:r>
+              <a:rPr dirty="0"/>
+              <a:t>》。</a:t>
+            </a:r>
+            <a:r>
+              <a:rPr dirty="0" err="1"/>
+              <a:t>我的导师是</a:t>
+            </a:r>
+            <a:r>
+              <a:rPr lang="zh-CN" altLang="en-US" dirty="0"/>
+              <a:t>魏恒峰和葛季栋老师</a:t>
+            </a:r>
+            <a:r>
+              <a:rPr dirty="0"/>
+              <a:t>。</a:t>
+            </a:r>
+            <a:r>
+              <a:rPr dirty="0" err="1"/>
+              <a:t>下面开始我的</a:t>
+            </a:r>
+            <a:r>
+              <a:rPr lang="zh-CN" altLang="en-US" dirty="0"/>
+              <a:t>答辩</a:t>
+            </a:r>
+            <a:r>
+              <a:rPr dirty="0"/>
+              <a:t>。</a:t>
             </a:r>
           </a:p>
         </p:txBody>
@@ -1738,13 +1776,29 @@
           <a:lstStyle/>
           <a:p>
             <a:r>
-              <a:t>【建议 15s】</a:t>
+              <a:rPr dirty="0"/>
+              <a:t>【</a:t>
             </a:r>
-          </a:p>
-          <a:p>
             <a:r>
-              <a:t>汇报分为五个部分：研究背景与问题动机、相关背景知识、操作语义设计与TLA+验证、原型系统实现，以及实验结果与总结展望。前两部分简要交代，后三部分是本文主要工作。</a:t>
+              <a:rPr dirty="0" err="1"/>
+              <a:t>建议</a:t>
             </a:r>
+            <a:r>
+              <a:rPr dirty="0"/>
+              <a:t> 15s】</a:t>
+            </a:r>
+            <a:br>
+              <a:rPr lang="en-US" dirty="0"/>
+            </a:br>
+            <a:r>
+              <a:rPr lang="en-US" dirty="0" err="1"/>
+              <a:t>我的答辩分为一下五个部分</a:t>
+            </a:r>
+            <a:r>
+              <a:rPr lang="zh-CN" altLang="en-US" dirty="0"/>
+              <a:t>。</a:t>
+            </a:r>
+            <a:endParaRPr dirty="0"/>
           </a:p>
         </p:txBody>
       </p:sp>
@@ -3115,12 +3169,30 @@
           <a:lstStyle/>
           <a:p>
             <a:r>
-              <a:t>【建议 30s】</a:t>
+              <a:rPr dirty="0"/>
+              <a:t>【</a:t>
+            </a:r>
+            <a:r>
+              <a:rPr dirty="0" err="1"/>
+              <a:t>建议</a:t>
+            </a:r>
+            <a:r>
+              <a:rPr dirty="0"/>
+              <a:t> 30s】</a:t>
             </a:r>
           </a:p>
           <a:p>
             <a:r>
-              <a:t>分布式数据库是高并发互联网业务的核心基础设施。不同事务对一致性和性能的诉求并不一致——金融转账要求强一致，日志统计更看重吞吐。传统做法只能为整个系统选定一个隔离级别：强级别正确但同步开销大，弱级别高效但核心业务有风险。本文要回答三个问题：如何统一刻画多种隔离级别？如何给出可实现、可验证的混合隔离操作语义？如何用原型与实验说明性能意义？</a:t>
+              <a:rPr dirty="0" err="1"/>
+              <a:t>分布式数据库是高并发互联网业务的核心基础设施。不同事务对一致性和性能的诉求并不一致。传统做法</a:t>
+            </a:r>
+            <a:r>
+              <a:rPr lang="zh-CN" altLang="en-US" dirty="0"/>
+              <a:t>一般</a:t>
+            </a:r>
+            <a:r>
+              <a:rPr dirty="0"/>
+              <a:t>只能为整个系统选定一个隔离级别：强级别正确但同步开销大，弱级别高效但核心业务有风险。本文要回答三个问题：如何统一刻画多种隔离级别？如何给出可实现、可验证的混合隔离操作语义？如何用原型与实验说明性能意义？</a:t>
             </a:r>
           </a:p>
         </p:txBody>
@@ -3707,7 +3779,7 @@
           <a:p>
             <a:fld id="{1D6BF384-2131-4261-8852-16AD67A1D3BA}" type="datetime1">
               <a:rPr lang="zh-CN" altLang="en-US" smtClean="0"/>
-              <a:t>2026/5/10</a:t>
+              <a:t>2026/5/22</a:t>
             </a:fld>
             <a:endParaRPr lang="zh-CN" altLang="en-US"/>
           </a:p>
@@ -3858,7 +3930,7 @@
           <a:p>
             <a:fld id="{03EC4375-C1B8-4F0A-ABA0-C72BF26C219A}" type="datetime1">
               <a:rPr lang="zh-CN" altLang="en-US" smtClean="0"/>
-              <a:t>2026/5/10</a:t>
+              <a:t>2026/5/22</a:t>
             </a:fld>
             <a:endParaRPr lang="zh-CN" altLang="en-US"/>
           </a:p>
@@ -5716,7 +5788,7 @@
           <a:p>
             <a:fld id="{5566D5A8-B853-4D5C-BC79-49888D31E9CB}" type="datetime1">
               <a:rPr lang="zh-CN" altLang="en-US" smtClean="0"/>
-              <a:t>2026/5/10</a:t>
+              <a:t>2026/5/22</a:t>
             </a:fld>
             <a:endParaRPr lang="zh-CN" altLang="en-US"/>
           </a:p>
@@ -5976,7 +6048,7 @@
           <a:p>
             <a:fld id="{058F99AB-7763-4874-A7C4-F52B807A58E2}" type="datetime1">
               <a:rPr lang="zh-CN" altLang="en-US" smtClean="0"/>
-              <a:t>2026/5/10</a:t>
+              <a:t>2026/5/22</a:t>
             </a:fld>
             <a:endParaRPr lang="zh-CN" altLang="en-US"/>
           </a:p>
@@ -6365,7 +6437,7 @@
           <a:p>
             <a:fld id="{DD44B907-7164-4AA4-B855-102E540E104F}" type="datetime1">
               <a:rPr lang="zh-CN" altLang="en-US" smtClean="0"/>
-              <a:t>2026/5/10</a:t>
+              <a:t>2026/5/22</a:t>
             </a:fld>
             <a:endParaRPr lang="zh-CN" altLang="en-US"/>
           </a:p>
@@ -6744,7 +6816,7 @@
           <a:p>
             <a:fld id="{1DD7BB3E-BB98-4838-8A06-573E5D1F6D67}" type="datetime1">
               <a:rPr lang="zh-CN" altLang="en-US" smtClean="0"/>
-              <a:t>2026/5/10</a:t>
+              <a:t>2026/5/22</a:t>
             </a:fld>
             <a:endParaRPr lang="zh-CN" altLang="en-US"/>
           </a:p>
@@ -6885,7 +6957,7 @@
           <a:p>
             <a:fld id="{2CAA3E53-6679-4440-90E5-54634E5CEC5D}" type="datetime1">
               <a:rPr lang="zh-CN" altLang="en-US" smtClean="0"/>
-              <a:t>2026/5/10</a:t>
+              <a:t>2026/5/22</a:t>
             </a:fld>
             <a:endParaRPr lang="zh-CN" altLang="en-US"/>
           </a:p>
@@ -6991,7 +7063,7 @@
           <a:p>
             <a:fld id="{E540FE58-6264-408A-BF41-97FE7044882D}" type="datetime1">
               <a:rPr lang="zh-CN" altLang="en-US" smtClean="0"/>
-              <a:t>2026/5/10</a:t>
+              <a:t>2026/5/22</a:t>
             </a:fld>
             <a:endParaRPr lang="zh-CN" altLang="en-US"/>
           </a:p>
@@ -7263,7 +7335,7 @@
           <a:p>
             <a:fld id="{A79C0C9E-4E9E-44E1-8418-EFBDB1BC1470}" type="datetime1">
               <a:rPr lang="zh-CN" altLang="en-US" smtClean="0"/>
-              <a:t>2026/5/10</a:t>
+              <a:t>2026/5/22</a:t>
             </a:fld>
             <a:endParaRPr lang="zh-CN" altLang="en-US" dirty="0"/>
           </a:p>
@@ -7458,7 +7530,7 @@
           <a:p>
             <a:fld id="{6549BD08-13C4-4050-A2C5-7B25B3358C18}" type="datetime1">
               <a:rPr lang="zh-CN" altLang="en-US" smtClean="0"/>
-              <a:t>2026/5/10</a:t>
+              <a:t>2026/5/22</a:t>
             </a:fld>
             <a:endParaRPr lang="zh-CN" altLang="en-US"/>
           </a:p>
@@ -7685,7 +7757,7 @@
           <a:p>
             <a:fld id="{B5156480-3C65-45B2-92B6-461BE7863C6E}" type="datetime1">
               <a:rPr lang="zh-CN" altLang="en-US" smtClean="0"/>
-              <a:t>2026/5/10</a:t>
+              <a:t>2026/5/22</a:t>
             </a:fld>
             <a:endParaRPr lang="zh-CN" altLang="en-US" dirty="0"/>
           </a:p>
@@ -8159,7 +8231,7 @@
                   <a:schemeClr val="tx1"/>
                 </a:solidFill>
               </a:rPr>
-              <a:t>导师：葛季栋 副教授、魏恒峰 特任副研究员</a:t>
+              <a:t>导师：魏恒峰 特任副研究员、葛季栋 副教授</a:t>
             </a:r>
           </a:p>
           <a:p>
@@ -8170,7 +8242,7 @@
                   <a:schemeClr val="tx1"/>
                 </a:solidFill>
               </a:rPr>
-              <a:t xml:space="preserve">2026 </a:t>
+              <a:t>2026 </a:t>
             </a:r>
             <a:r>
               <a:rPr lang="zh-CN" altLang="en-US" sz="2000" b="1" dirty="0">
@@ -8178,7 +8250,7 @@
                   <a:schemeClr val="tx1"/>
                 </a:solidFill>
               </a:rPr>
-              <a:t xml:space="preserve">年 </a:t>
+              <a:t>年 </a:t>
             </a:r>
             <a:r>
               <a:rPr lang="en-US" altLang="zh-CN" sz="2000" b="1" dirty="0">
@@ -8186,7 +8258,7 @@
                   <a:schemeClr val="tx1"/>
                 </a:solidFill>
               </a:rPr>
-              <a:t xml:space="preserve">5 </a:t>
+              <a:t>5 </a:t>
             </a:r>
             <a:r>
               <a:rPr lang="zh-CN" altLang="en-US" sz="2000" b="1" dirty="0">
@@ -10199,7 +10271,7 @@
                   <a:cs typeface="Roboto"/>
                   <a:sym typeface="Roboto"/>
                 </a:rPr>
-                <a:t xml:space="preserve"> (PO)</a:t>
+                <a:t> (PO)</a:t>
               </a:r>
               <a:endParaRPr lang="en-US" sz="1000" dirty="0"/>
             </a:p>
@@ -15116,7 +15188,7 @@
                     <a:cs typeface="Roboto"/>
                     <a:sym typeface="Roboto"/>
                   </a:rPr>
-                  <a:t xml:space="preserve">基于抽象执行模型 </a:t>
+                  <a:t>基于抽象执行模型 </a:t>
                 </a:r>
                 <a14:m>
                   <m:oMath xmlns:m="http://schemas.openxmlformats.org/officeDocument/2006/math">
@@ -16263,7 +16335,7 @@
                 <a:cs typeface="Roboto"/>
                 <a:sym typeface="Roboto"/>
               </a:rPr>
-              <a:t xml:space="preserve"> </a:t>
+              <a:t> </a:t>
             </a:r>
             <a:r>
               <a:rPr lang="en-US" sz="1400" b="0" i="0" u="none" strike="noStrike" dirty="0" err="1">
@@ -16287,7 +16359,7 @@
                 <a:cs typeface="Roboto"/>
                 <a:sym typeface="Roboto"/>
               </a:rPr>
-              <a:t xml:space="preserve"> T </a:t>
+              <a:t> T </a:t>
             </a:r>
             <a:r>
               <a:rPr lang="en-US" sz="1400" b="0" i="0" u="none" strike="noStrike" dirty="0" err="1">
@@ -16311,7 +16383,7 @@
                 <a:cs typeface="Roboto"/>
                 <a:sym typeface="Roboto"/>
               </a:rPr>
-              <a:t xml:space="preserve"> RA, CC, SI, SER）。</a:t>
+              <a:t> RA, CC, SI, SER）。</a:t>
             </a:r>
             <a:endParaRPr lang="en-US" sz="1100" dirty="0">
               <a:solidFill>
@@ -16612,7 +16684,7 @@
                     <a:cs typeface="Roboto"/>
                     <a:sym typeface="Roboto"/>
                   </a:rPr>
-                  <a:t xml:space="preserve">若任意事务 </a:t>
+                  <a:t>若任意事务 </a:t>
                 </a:r>
                 <a14:m>
                   <m:oMath xmlns:m="http://schemas.openxmlformats.org/officeDocument/2006/math">
@@ -16671,7 +16743,7 @@
                     <a:cs typeface="Roboto"/>
                     <a:sym typeface="Roboto"/>
                   </a:rPr>
-                  <a:t xml:space="preserve">∈ T </a:t>
+                  <a:t>∈ T </a:t>
                 </a:r>
                 <a:r>
                   <a:rPr lang="en-US" sz="1400" b="0" i="0" u="none" strike="noStrike" dirty="0" err="1">
@@ -16695,7 +16767,7 @@
                     <a:cs typeface="Roboto"/>
                     <a:sym typeface="Roboto"/>
                   </a:rPr>
-                  <a:t xml:space="preserve"> </a:t>
+                  <a:t> </a:t>
                 </a:r>
                 <a14:m>
                   <m:oMath xmlns:m="http://schemas.openxmlformats.org/officeDocument/2006/math">
@@ -16783,7 +16855,7 @@
                     <a:cs typeface="Roboto"/>
                     <a:sym typeface="Roboto"/>
                   </a:rPr>
-                  <a:t xml:space="preserve"> </a:t>
+                  <a:t> </a:t>
                 </a:r>
                 <a:r>
                   <a:rPr lang="en-US" sz="1400" b="0" i="0" u="none" strike="noStrike" dirty="0" err="1">
@@ -17786,7 +17858,7 @@
                     <a:cs typeface="Roboto"/>
                     <a:sym typeface="Roboto"/>
                   </a:rPr>
-                  <a:t xml:space="preserve">历史 </a:t>
+                  <a:t>历史 </a:t>
                 </a:r>
                 <a14:m>
                   <m:oMath xmlns:m="http://schemas.openxmlformats.org/officeDocument/2006/math">
@@ -17814,7 +17886,7 @@
                     <a:cs typeface="Roboto"/>
                     <a:sym typeface="Roboto"/>
                   </a:rPr>
-                  <a:t xml:space="preserve"> </a:t>
+                  <a:t> </a:t>
                 </a:r>
                 <a:r>
                   <a:rPr lang="en-US" sz="1400" b="0" i="0" u="none" strike="noStrike" dirty="0" err="1">
@@ -17838,7 +17910,7 @@
                     <a:cs typeface="Roboto"/>
                     <a:sym typeface="Roboto"/>
                   </a:rPr>
-                  <a:t xml:space="preserve"> </a:t>
+                  <a:t> </a:t>
                 </a:r>
                 <a14:m>
                   <m:oMath xmlns:m="http://schemas.openxmlformats.org/officeDocument/2006/math">
@@ -17866,7 +17938,7 @@
                     <a:cs typeface="Roboto"/>
                     <a:sym typeface="Roboto"/>
                   </a:rPr>
-                  <a:t xml:space="preserve"> </a:t>
+                  <a:t> </a:t>
                 </a:r>
                 <a:r>
                   <a:rPr lang="en-US" sz="1400" b="0" i="0" u="none" strike="noStrike" dirty="0" err="1">
@@ -17890,7 +17962,7 @@
                     <a:cs typeface="Roboto"/>
                     <a:sym typeface="Roboto"/>
                   </a:rPr>
-                  <a:t xml:space="preserve"> </a:t>
+                  <a:t> </a:t>
                 </a:r>
                 <a14:m>
                   <m:oMath xmlns:m="http://schemas.openxmlformats.org/officeDocument/2006/math">
@@ -17930,7 +18002,7 @@
                     <a:cs typeface="Roboto"/>
                     <a:sym typeface="Roboto"/>
                   </a:rPr>
-                  <a:t xml:space="preserve"> </a:t>
+                  <a:t> </a:t>
                 </a:r>
                 <a14:m>
                   <m:oMath xmlns:m="http://schemas.openxmlformats.org/officeDocument/2006/math">
@@ -18412,7 +18484,7 @@
                     <a:cs typeface="Roboto"/>
                     <a:sym typeface="Roboto"/>
                   </a:rPr>
-                  <a:t xml:space="preserve"> </a:t>
+                  <a:t> </a:t>
                 </a:r>
                 <a14:m>
                   <m:oMath xmlns:m="http://schemas.openxmlformats.org/officeDocument/2006/math">
@@ -18464,7 +18536,7 @@
                     <a:cs typeface="Roboto"/>
                     <a:sym typeface="Roboto"/>
                   </a:rPr>
-                  <a:t xml:space="preserve"> </a:t>
+                  <a:t> </a:t>
                 </a:r>
                 <a14:m>
                   <m:oMath xmlns:m="http://schemas.openxmlformats.org/officeDocument/2006/math">
@@ -21506,7 +21578,7 @@
                 <a:cs typeface="Roboto"/>
                 <a:sym typeface="Roboto"/>
               </a:rPr>
-              <a:t xml:space="preserve"> (wall) </a:t>
+              <a:t> (wall) </a:t>
             </a:r>
             <a:r>
               <a:rPr lang="en-US" sz="1500" b="0" i="0" u="none" strike="noStrike" dirty="0" err="1">
@@ -21530,7 +21602,7 @@
                 <a:cs typeface="Roboto"/>
                 <a:sym typeface="Roboto"/>
               </a:rPr>
-              <a:t xml:space="preserve"> (logical)，</a:t>
+              <a:t> (logical)，</a:t>
             </a:r>
             <a:r>
               <a:rPr lang="en-US" sz="1500" b="0" i="0" u="none" strike="noStrike" dirty="0" err="1">
@@ -22479,7 +22551,7 @@
                     <a:cs typeface="Roboto"/>
                     <a:sym typeface="Roboto"/>
                   </a:rPr>
-                  <a:t xml:space="preserve">- </a:t>
+                  <a:t>- </a:t>
                 </a:r>
                 <a:r>
                   <a:rPr lang="en-US" sz="1600" b="1" i="0" u="none" strike="noStrike" dirty="0" err="1">
@@ -22828,7 +22900,7 @@
                     <a:cs typeface="Roboto"/>
                     <a:sym typeface="Roboto"/>
                   </a:rPr>
-                  <a:t xml:space="preserve">• </a:t>
+                  <a:t>• </a:t>
                 </a:r>
                 <a:r>
                   <a:rPr lang="en-US" sz="1400" b="0" i="0" u="none" strike="noStrike" dirty="0" err="1">
@@ -22904,7 +22976,7 @@
                     <a:cs typeface="Roboto"/>
                     <a:sym typeface="Roboto"/>
                   </a:rPr>
-                  <a:t xml:space="preserve"> </a:t>
+                  <a:t> </a:t>
                 </a:r>
                 <a14:m>
                   <m:oMath xmlns:m="http://schemas.openxmlformats.org/officeDocument/2006/math">
@@ -22932,7 +23004,7 @@
                     <a:cs typeface="Roboto"/>
                     <a:sym typeface="Roboto"/>
                   </a:rPr>
-                  <a:t xml:space="preserve"> 为 </a:t>
+                  <a:t> 为 </a:t>
                 </a:r>
                 <a14:m>
                   <m:oMath xmlns:m="http://schemas.openxmlformats.org/officeDocument/2006/math">
@@ -22972,7 +23044,7 @@
                     <a:cs typeface="Roboto"/>
                     <a:sym typeface="Roboto"/>
                   </a:rPr>
-                  <a:t xml:space="preserve"> </a:t>
+                  <a:t> </a:t>
                 </a:r>
                 <a14:m>
                   <m:oMath xmlns:m="http://schemas.openxmlformats.org/officeDocument/2006/math">
@@ -23000,7 +23072,7 @@
                     <a:cs typeface="Roboto"/>
                     <a:sym typeface="Roboto"/>
                   </a:rPr>
-                  <a:t xml:space="preserve"> </a:t>
+                  <a:t> </a:t>
                 </a:r>
                 <a:r>
                   <a:rPr lang="en-US" sz="1400" b="0" i="0" u="none" strike="noStrike" dirty="0" err="1">
@@ -23024,7 +23096,7 @@
                     <a:cs typeface="Roboto"/>
                     <a:sym typeface="Roboto"/>
                   </a:rPr>
-                  <a:t xml:space="preserve"> 0。</a:t>
+                  <a:t> 0。</a:t>
                 </a:r>
                 <a:endParaRPr lang="en-US" sz="1100" dirty="0">
                   <a:latin typeface="+mj-ea"/>
@@ -23047,7 +23119,7 @@
                     <a:cs typeface="Roboto"/>
                     <a:sym typeface="Roboto"/>
                   </a:rPr>
-                  <a:t xml:space="preserve">• </a:t>
+                  <a:t>• </a:t>
                 </a:r>
                 <a:r>
                   <a:rPr lang="en-US" sz="1400" b="0" i="0" u="none" strike="noStrike" dirty="0" err="1">
@@ -23087,7 +23159,7 @@
                     <a:cs typeface="Roboto"/>
                     <a:sym typeface="Roboto"/>
                   </a:rPr>
-                  <a:t xml:space="preserve"> </a:t>
+                  <a:t> </a:t>
                 </a:r>
                 <a:r>
                   <a:rPr lang="en-US" sz="1400" b="0" i="0" u="none" strike="noStrike" dirty="0" err="1">
@@ -23127,7 +23199,7 @@
                     <a:cs typeface="Roboto"/>
                     <a:sym typeface="Roboto"/>
                   </a:rPr>
-                  <a:t xml:space="preserve"> </a:t>
+                  <a:t> </a:t>
                 </a:r>
                 <a:r>
                   <a:rPr lang="en-US" sz="1400" b="0" i="0" u="none" strike="noStrike" dirty="0" err="1">
@@ -23151,7 +23223,7 @@
                     <a:cs typeface="Roboto"/>
                     <a:sym typeface="Roboto"/>
                   </a:rPr>
-                  <a:t xml:space="preserve"> 1。最终返回 </a:t>
+                  <a:t> 1。最终返回 </a:t>
                 </a:r>
                 <a14:m>
                   <m:oMath xmlns:m="http://schemas.openxmlformats.org/officeDocument/2006/math">
@@ -23848,7 +23920,7 @@
                     <a:cs typeface="Roboto"/>
                     <a:sym typeface="Roboto"/>
                   </a:rPr>
-                  <a:t xml:space="preserve">2. </a:t>
+                  <a:t>2. </a:t>
                 </a:r>
                 <a14:m>
                   <m:oMath xmlns:m="http://schemas.openxmlformats.org/officeDocument/2006/math">
@@ -23936,7 +24008,7 @@
                     <a:cs typeface="Roboto"/>
                     <a:sym typeface="Roboto"/>
                   </a:rPr>
-                  <a:t xml:space="preserve">- </a:t>
+                  <a:t>- </a:t>
                 </a:r>
                 <a:r>
                   <a:rPr lang="en-US" sz="1600" b="1" i="0" u="none" strike="noStrike" dirty="0" err="1">
@@ -24285,7 +24357,7 @@
                     <a:cs typeface="Roboto"/>
                     <a:sym typeface="Roboto"/>
                   </a:rPr>
-                  <a:t xml:space="preserve">• </a:t>
+                  <a:t>• </a:t>
                 </a:r>
                 <a:r>
                   <a:rPr lang="en-US" sz="1400" b="0" i="0" u="none" strike="noStrike" dirty="0" err="1">
@@ -24309,7 +24381,7 @@
                     <a:cs typeface="Roboto"/>
                     <a:sym typeface="Roboto"/>
                   </a:rPr>
-                  <a:t xml:space="preserve"> </a:t>
+                  <a:t> </a:t>
                 </a:r>
                 <a14:m>
                   <m:oMath xmlns:m="http://schemas.openxmlformats.org/officeDocument/2006/math">
@@ -24337,7 +24409,7 @@
                     <a:cs typeface="Roboto"/>
                     <a:sym typeface="Roboto"/>
                   </a:rPr>
-                  <a:t xml:space="preserve"> </a:t>
+                  <a:t> </a:t>
                 </a:r>
                 <a:r>
                   <a:rPr lang="en-US" sz="1400" b="0" i="0" u="none" strike="noStrike" dirty="0" err="1">
@@ -24535,7 +24607,7 @@
                     <a:cs typeface="Roboto"/>
                     <a:sym typeface="Roboto"/>
                   </a:rPr>
-                  <a:t xml:space="preserve">• </a:t>
+                  <a:t>• </a:t>
                 </a:r>
                 <a:r>
                   <a:rPr lang="en-US" sz="1400" b="0" i="0" u="none" strike="noStrike" dirty="0" err="1">
@@ -24559,7 +24631,7 @@
                     <a:cs typeface="Roboto"/>
                     <a:sym typeface="Roboto"/>
                   </a:rPr>
-                  <a:t xml:space="preserve"> </a:t>
+                  <a:t> </a:t>
                 </a:r>
                 <a14:m>
                   <m:oMath xmlns:m="http://schemas.openxmlformats.org/officeDocument/2006/math">
@@ -24587,7 +24659,7 @@
                     <a:cs typeface="Roboto"/>
                     <a:sym typeface="Roboto"/>
                   </a:rPr>
-                  <a:t xml:space="preserve"> </a:t>
+                  <a:t> </a:t>
                 </a:r>
                 <a:r>
                   <a:rPr lang="en-US" sz="1400" b="0" i="0" u="none" strike="noStrike" dirty="0" err="1">
@@ -24627,7 +24699,7 @@
                     <a:cs typeface="Roboto"/>
                     <a:sym typeface="Roboto"/>
                   </a:rPr>
-                  <a:t xml:space="preserve"> 置 0；若等于旧 </a:t>
+                  <a:t> 置 0；若等于旧 </a:t>
                 </a:r>
                 <a14:m>
                   <m:oMath xmlns:m="http://schemas.openxmlformats.org/officeDocument/2006/math">
@@ -24703,7 +24775,7 @@
                     <a:cs typeface="Roboto"/>
                     <a:sym typeface="Roboto"/>
                   </a:rPr>
-                  <a:t xml:space="preserve"> </a:t>
+                  <a:t> </a:t>
                 </a:r>
                 <a14:m>
                   <m:oMath xmlns:m="http://schemas.openxmlformats.org/officeDocument/2006/math">
@@ -24803,7 +24875,7 @@
                     <a:cs typeface="Roboto"/>
                     <a:sym typeface="Roboto"/>
                   </a:rPr>
-                  <a:t xml:space="preserve"> 1。</a:t>
+                  <a:t> 1。</a:t>
                 </a:r>
               </a:p>
             </p:txBody>
@@ -25357,7 +25429,7 @@
                   <a:srgbClr val="7030A0"/>
                 </a:solidFill>
               </a:rPr>
-              <a:t xml:space="preserve">不是简单取当前时间，而是让事务继承客户端维护的依赖时间戳 </a:t>
+              <a:t>不是简单取当前时间，而是让事务继承客户端维护的依赖时间戳 </a:t>
             </a:r>
             <a:r>
               <a:rPr lang="en-US" altLang="zh-CN" sz="1400" dirty="0">
@@ -25365,7 +25437,7 @@
                   <a:srgbClr val="7030A0"/>
                 </a:solidFill>
               </a:rPr>
-              <a:t xml:space="preserve">dep </a:t>
+              <a:t>dep </a:t>
             </a:r>
             <a:r>
               <a:rPr lang="zh-CN" altLang="en-US" sz="1400" dirty="0">
@@ -25373,7 +25445,7 @@
                   <a:srgbClr val="7030A0"/>
                 </a:solidFill>
               </a:rPr>
-              <a:t xml:space="preserve">作为快照起点，从而保证 </a:t>
+              <a:t>作为快照起点，从而保证 </a:t>
             </a:r>
             <a:r>
               <a:rPr lang="en-US" altLang="zh-CN" sz="1400" dirty="0">
@@ -25381,7 +25453,7 @@
                   <a:srgbClr val="7030A0"/>
                 </a:solidFill>
               </a:rPr>
-              <a:t xml:space="preserve">Session + </a:t>
+              <a:t>Session + </a:t>
             </a:r>
             <a:r>
               <a:rPr lang="en-US" altLang="zh-CN" sz="1400" dirty="0" err="1">
@@ -25478,7 +25550,7 @@
                   <a:srgbClr val="7030A0"/>
                 </a:solidFill>
               </a:rPr>
-              <a:t xml:space="preserve">读请求如果遇到某个键正被一个 </a:t>
+              <a:t>读请求如果遇到某个键正被一个 </a:t>
             </a:r>
             <a:r>
               <a:rPr lang="en-US" altLang="zh-CN" sz="1400" dirty="0" err="1">
@@ -25494,7 +25566,7 @@
                   <a:srgbClr val="7030A0"/>
                 </a:solidFill>
               </a:rPr>
-              <a:t xml:space="preserve"> &lt;= </a:t>
+              <a:t> &lt;= </a:t>
             </a:r>
             <a:r>
               <a:rPr lang="en-US" altLang="zh-CN" sz="1400" dirty="0" err="1">
@@ -25510,7 +25582,7 @@
                   <a:srgbClr val="7030A0"/>
                 </a:solidFill>
               </a:rPr>
-              <a:t xml:space="preserve"> </a:t>
+              <a:t> </a:t>
             </a:r>
             <a:r>
               <a:rPr lang="zh-CN" altLang="en-US" sz="1400" dirty="0">
@@ -27899,7 +27971,7 @@
                 <a:cs typeface="Roboto"/>
                 <a:sym typeface="Roboto"/>
               </a:rPr>
-              <a:t xml:space="preserve"> (SI-S2PL)：</a:t>
+              <a:t> (SI-S2PL)：</a:t>
             </a:r>
             <a:r>
               <a:rPr lang="en-US" sz="1400" b="0" i="0" u="none" strike="noStrike" dirty="0" err="1">
@@ -27962,7 +28034,7 @@
                 <a:cs typeface="Roboto"/>
                 <a:sym typeface="Roboto"/>
               </a:rPr>
-              <a:t xml:space="preserve"> (SI-S2PL)：</a:t>
+              <a:t> (SI-S2PL)：</a:t>
             </a:r>
             <a:r>
               <a:rPr lang="en-US" sz="1400" b="0" i="0" u="none" strike="noStrike" dirty="0" err="1">
@@ -30573,7 +30645,7 @@
             </a:pPr>
             <a:r>
               <a:rPr lang="zh-CN" altLang="en-US" sz="1800" b="1" dirty="0"/>
-              <a:t xml:space="preserve">操作语义与 </a:t>
+              <a:t>操作语义与 </a:t>
             </a:r>
             <a:r>
               <a:rPr lang="en-US" altLang="zh-CN" sz="1800" b="1" dirty="0"/>
@@ -30585,7 +30657,7 @@
             </a:r>
             <a:r>
               <a:rPr lang="en-US" altLang="zh-CN" sz="1800" b="1" dirty="0"/>
-              <a:t xml:space="preserve"> </a:t>
+              <a:t> </a:t>
             </a:r>
             <a:r>
               <a:rPr lang="zh-CN" altLang="en-US" sz="1800" b="1" dirty="0"/>
@@ -31690,7 +31762,7 @@
                   <a:schemeClr val="tx1"/>
                 </a:solidFill>
               </a:rPr>
-              <a:t xml:space="preserve">1. VIS / AR -&gt; </a:t>
+              <a:t>1. VIS / AR -&gt; </a:t>
             </a:r>
             <a:r>
               <a:rPr lang="zh-CN" altLang="en-US" sz="1500" b="1">
@@ -31713,7 +31785,7 @@
                   <a:schemeClr val="tx1"/>
                 </a:solidFill>
               </a:rPr>
-              <a:t xml:space="preserve">2. </a:t>
+              <a:t>2. </a:t>
             </a:r>
             <a:r>
               <a:rPr lang="zh-CN" altLang="en-US" sz="1500" b="1">
@@ -31721,7 +31793,7 @@
                   <a:schemeClr val="tx1"/>
                 </a:solidFill>
               </a:rPr>
-              <a:t xml:space="preserve">抽象执行历史 </a:t>
+              <a:t>抽象执行历史 </a:t>
             </a:r>
             <a:r>
               <a:rPr lang="en-US" altLang="zh-CN" sz="1500" b="1">
@@ -31729,7 +31801,7 @@
                   <a:schemeClr val="tx1"/>
                 </a:solidFill>
               </a:rPr>
-              <a:t xml:space="preserve">-&gt; </a:t>
+              <a:t>-&gt; </a:t>
             </a:r>
             <a:r>
               <a:rPr lang="zh-CN" altLang="en-US" sz="1500" b="1">
@@ -31752,7 +31824,7 @@
                   <a:schemeClr val="tx1"/>
                 </a:solidFill>
               </a:rPr>
-              <a:t xml:space="preserve">3. StartTx / ExecuteOp / CommitTx -&gt; Router </a:t>
+              <a:t>3. StartTx / ExecuteOp / CommitTx -&gt; Router </a:t>
             </a:r>
             <a:r>
               <a:rPr lang="zh-CN" altLang="en-US" sz="1500" b="1">
@@ -31760,7 +31832,7 @@
                   <a:schemeClr val="tx1"/>
                 </a:solidFill>
               </a:rPr>
-              <a:t xml:space="preserve">与 </a:t>
+              <a:t>与 </a:t>
             </a:r>
             <a:r>
               <a:rPr lang="en-US" altLang="zh-CN" sz="1500" b="1">
@@ -31768,7 +31840,7 @@
                   <a:schemeClr val="tx1"/>
                 </a:solidFill>
               </a:rPr>
-              <a:t xml:space="preserve">Shard </a:t>
+              <a:t>Shard </a:t>
             </a:r>
             <a:r>
               <a:rPr lang="zh-CN" altLang="en-US" sz="1500" b="1">
@@ -31791,7 +31863,7 @@
                   <a:schemeClr val="tx1"/>
                 </a:solidFill>
               </a:rPr>
-              <a:t xml:space="preserve">4. </a:t>
+              <a:t>4. </a:t>
             </a:r>
             <a:r>
               <a:rPr lang="zh-CN" altLang="en-US" sz="1500" b="1">
@@ -34158,15 +34230,15 @@
             </a:br>
             <a:r>
               <a:rPr lang="en-US" altLang="zh-CN" dirty="0"/>
-              <a:t xml:space="preserve">1. </a:t>
+              <a:t>1. </a:t>
             </a:r>
             <a:r>
               <a:rPr lang="zh-CN" altLang="en-US" dirty="0"/>
-              <a:t xml:space="preserve">实验结果表明，经过 </a:t>
+              <a:t>实验结果表明，经过 </a:t>
             </a:r>
             <a:r>
               <a:rPr lang="en-US" altLang="zh-CN" dirty="0"/>
-              <a:t xml:space="preserve">MIA </a:t>
+              <a:t>MIA </a:t>
             </a:r>
             <a:r>
               <a:rPr lang="zh-CN" altLang="en-US" dirty="0"/>
@@ -34174,7 +34246,7 @@
             </a:r>
             <a:r>
               <a:rPr lang="en-US" altLang="zh-CN" dirty="0"/>
-              <a:t xml:space="preserve">MIAED </a:t>
+              <a:t>MIAED </a:t>
             </a:r>
             <a:r>
               <a:rPr lang="zh-CN" altLang="en-US" dirty="0"/>
@@ -34184,7 +34256,7 @@
           <a:p>
             <a:r>
               <a:rPr lang="en-US" altLang="zh-CN" dirty="0"/>
-              <a:t xml:space="preserve">2. </a:t>
+              <a:t>2. </a:t>
             </a:r>
             <a:r>
               <a:rPr lang="zh-CN" altLang="en-US" dirty="0"/>
@@ -34200,23 +34272,23 @@
             </a:r>
             <a:r>
               <a:rPr lang="en-US" altLang="zh-CN" dirty="0"/>
-              <a:t xml:space="preserve"> </a:t>
+              <a:t> </a:t>
             </a:r>
             <a:r>
               <a:rPr lang="zh-CN" altLang="en-US" dirty="0"/>
-              <a:t xml:space="preserve">的平均吞吐率由 </a:t>
+              <a:t>的平均吞吐率由 </a:t>
             </a:r>
             <a:r>
               <a:rPr lang="en-US" altLang="zh-CN" dirty="0"/>
-              <a:t xml:space="preserve">SER </a:t>
+              <a:t>SER </a:t>
             </a:r>
             <a:r>
               <a:rPr lang="zh-CN" altLang="en-US" dirty="0"/>
-              <a:t xml:space="preserve">的 </a:t>
+              <a:t>的 </a:t>
             </a:r>
             <a:r>
               <a:rPr lang="en-US" altLang="zh-CN" dirty="0"/>
-              <a:t xml:space="preserve">69.36 </a:t>
+              <a:t>69.36 </a:t>
             </a:r>
             <a:r>
               <a:rPr lang="en-US" altLang="zh-CN" dirty="0" err="1"/>
@@ -34224,15 +34296,15 @@
             </a:r>
             <a:r>
               <a:rPr lang="en-US" altLang="zh-CN" dirty="0"/>
-              <a:t xml:space="preserve">/s </a:t>
+              <a:t>/s </a:t>
             </a:r>
             <a:r>
               <a:rPr lang="zh-CN" altLang="en-US" dirty="0"/>
-              <a:t xml:space="preserve">提升至 </a:t>
+              <a:t>提升至 </a:t>
             </a:r>
             <a:r>
               <a:rPr lang="en-US" altLang="zh-CN" dirty="0"/>
-              <a:t xml:space="preserve">206.19 </a:t>
+              <a:t>206.19 </a:t>
             </a:r>
             <a:r>
               <a:rPr lang="en-US" altLang="zh-CN" dirty="0" err="1"/>
@@ -34244,7 +34316,7 @@
             </a:r>
             <a:r>
               <a:rPr lang="zh-CN" altLang="en-US" dirty="0"/>
-              <a:t xml:space="preserve">，增幅约 </a:t>
+              <a:t>，增幅约 </a:t>
             </a:r>
             <a:r>
               <a:rPr lang="en-US" altLang="zh-CN" dirty="0"/>
@@ -34258,7 +34330,7 @@
           <a:p>
             <a:r>
               <a:rPr lang="en-US" altLang="zh-CN" dirty="0"/>
-              <a:t xml:space="preserve">3. </a:t>
+              <a:t>3. </a:t>
             </a:r>
             <a:r>
               <a:rPr lang="zh-CN" altLang="en-US" dirty="0"/>
@@ -34274,23 +34346,23 @@
             </a:r>
             <a:r>
               <a:rPr lang="en-US" altLang="zh-CN" dirty="0"/>
-              <a:t xml:space="preserve"> </a:t>
+              <a:t> </a:t>
             </a:r>
             <a:r>
               <a:rPr lang="zh-CN" altLang="en-US" dirty="0"/>
-              <a:t xml:space="preserve">的平均吞吐率由 </a:t>
+              <a:t>的平均吞吐率由 </a:t>
             </a:r>
             <a:r>
               <a:rPr lang="en-US" altLang="zh-CN" dirty="0"/>
-              <a:t xml:space="preserve">SER </a:t>
+              <a:t>SER </a:t>
             </a:r>
             <a:r>
               <a:rPr lang="zh-CN" altLang="en-US" dirty="0"/>
-              <a:t xml:space="preserve">的 </a:t>
+              <a:t>的 </a:t>
             </a:r>
             <a:r>
               <a:rPr lang="en-US" altLang="zh-CN" dirty="0"/>
-              <a:t xml:space="preserve">7.13 </a:t>
+              <a:t>7.13 </a:t>
             </a:r>
             <a:r>
               <a:rPr lang="en-US" altLang="zh-CN" dirty="0" err="1"/>
@@ -34298,15 +34370,15 @@
             </a:r>
             <a:r>
               <a:rPr lang="en-US" altLang="zh-CN" dirty="0"/>
-              <a:t xml:space="preserve">/s </a:t>
+              <a:t>/s </a:t>
             </a:r>
             <a:r>
               <a:rPr lang="zh-CN" altLang="en-US" dirty="0"/>
-              <a:t xml:space="preserve">提升至 </a:t>
+              <a:t>提升至 </a:t>
             </a:r>
             <a:r>
               <a:rPr lang="en-US" altLang="zh-CN" dirty="0"/>
-              <a:t xml:space="preserve">21.17 </a:t>
+              <a:t>21.17 </a:t>
             </a:r>
             <a:r>
               <a:rPr lang="en-US" altLang="zh-CN" dirty="0" err="1"/>
@@ -34318,7 +34390,7 @@
             </a:r>
             <a:r>
               <a:rPr lang="zh-CN" altLang="en-US" dirty="0"/>
-              <a:t xml:space="preserve">，增幅约 </a:t>
+              <a:t>，增幅约 </a:t>
             </a:r>
             <a:r>
               <a:rPr lang="en-US" altLang="zh-CN" dirty="0"/>
@@ -34385,7 +34457,7 @@
                   <a:srgbClr val="870078"/>
                 </a:solidFill>
               </a:rPr>
-              <a:t xml:space="preserve">经过 </a:t>
+              <a:t>经过 </a:t>
             </a:r>
             <a:r>
               <a:rPr lang="en-US" altLang="zh-CN" dirty="0">
@@ -34393,7 +34465,7 @@
                   <a:srgbClr val="870078"/>
                 </a:solidFill>
               </a:rPr>
-              <a:t xml:space="preserve">MIA </a:t>
+              <a:t>MIA </a:t>
             </a:r>
             <a:r>
               <a:rPr lang="zh-CN" altLang="en-US" dirty="0">
@@ -34432,7 +34504,7 @@
                   <a:srgbClr val="870078"/>
                 </a:solidFill>
               </a:rPr>
-              <a:t xml:space="preserve">在单可用区和跨可用区两种部署方式下， </a:t>
+              <a:t>在单可用区和跨可用区两种部署方式下， </a:t>
             </a:r>
             <a:r>
               <a:rPr lang="en-US" altLang="zh-CN" dirty="0">
@@ -34456,7 +34528,7 @@
                   <a:srgbClr val="870078"/>
                 </a:solidFill>
               </a:rPr>
-              <a:t xml:space="preserve"> </a:t>
+              <a:t> </a:t>
             </a:r>
             <a:r>
               <a:rPr lang="zh-CN" altLang="en-US" dirty="0">
@@ -34464,7 +34536,7 @@
                   <a:srgbClr val="870078"/>
                 </a:solidFill>
               </a:rPr>
-              <a:t xml:space="preserve">相比单一 </a:t>
+              <a:t>相比单一 </a:t>
             </a:r>
             <a:r>
               <a:rPr lang="en-US" altLang="zh-CN" dirty="0">
@@ -34472,7 +34544,7 @@
                   <a:srgbClr val="870078"/>
                 </a:solidFill>
               </a:rPr>
-              <a:t xml:space="preserve">SER </a:t>
+              <a:t>SER </a:t>
             </a:r>
             <a:r>
               <a:rPr lang="zh-CN" altLang="en-US" dirty="0">
@@ -34480,7 +34552,7 @@
                   <a:srgbClr val="870078"/>
                 </a:solidFill>
               </a:rPr>
-              <a:t xml:space="preserve">策略均实现了约 </a:t>
+              <a:t>策略均实现了约 </a:t>
             </a:r>
             <a:r>
               <a:rPr lang="en-US" altLang="zh-CN" dirty="0">
@@ -34488,7 +34560,7 @@
                   <a:srgbClr val="870078"/>
                 </a:solidFill>
               </a:rPr>
-              <a:t xml:space="preserve">2 </a:t>
+              <a:t>2 </a:t>
             </a:r>
             <a:r>
               <a:rPr lang="zh-CN" altLang="en-US" dirty="0">
@@ -36984,7 +37056,7 @@
                 <a:cs typeface="+mn-cs"/>
                 <a:sym typeface="Roboto"/>
               </a:rPr>
-              <a:t xml:space="preserve"> TLA+ </a:t>
+              <a:t> TLA+ </a:t>
             </a:r>
             <a:r>
               <a:rPr lang="en-US" sz="1800" dirty="0" err="1">
@@ -37906,7 +37978,7 @@
                 <a:cs typeface="+mn-cs"/>
                 <a:sym typeface="Roboto"/>
               </a:rPr>
-              <a:t xml:space="preserve"> KV </a:t>
+              <a:t> KV </a:t>
             </a:r>
             <a:r>
               <a:rPr lang="en-US" sz="1800" dirty="0" err="1">
@@ -39810,7 +39882,7 @@
                 <a:cs typeface="+mn-cs"/>
                 <a:sym typeface="Roboto"/>
               </a:rPr>
-              <a:t xml:space="preserve"> TPC-C、YCSB </a:t>
+              <a:t> TPC-C、YCSB </a:t>
             </a:r>
             <a:r>
               <a:rPr lang="en-US" sz="1800" dirty="0" err="1">
@@ -41070,7 +41142,7 @@
                 <a:cs typeface="+mn-cs"/>
                 <a:sym typeface="Roboto"/>
               </a:rPr>
-              <a:t xml:space="preserve"> 2PC </a:t>
+              <a:t> 2PC </a:t>
             </a:r>
             <a:r>
               <a:rPr lang="en-US" sz="1800" dirty="0" err="1">
@@ -45039,7 +45111,7 @@
                 <a:latin typeface="+mn-ea"/>
                 <a:sym typeface="等线" panose="02010600030101010101" pitchFamily="2" charset="-122"/>
               </a:rPr>
-              <a:t xml:space="preserve">1. </a:t>
+              <a:t>1. </a:t>
             </a:r>
             <a:r>
               <a:rPr lang="zh-CN" altLang="en-US" sz="1500" b="1" dirty="0">
@@ -45066,7 +45138,7 @@
                 <a:latin typeface="+mn-ea"/>
                 <a:sym typeface="等线" panose="02010600030101010101" pitchFamily="2" charset="-122"/>
               </a:rPr>
-              <a:t xml:space="preserve">2. </a:t>
+              <a:t>2. </a:t>
             </a:r>
             <a:r>
               <a:rPr lang="zh-CN" altLang="en-US" sz="1500" b="1" dirty="0">
@@ -45093,7 +45165,7 @@
                 <a:latin typeface="+mn-ea"/>
                 <a:sym typeface="等线" panose="02010600030101010101" pitchFamily="2" charset="-122"/>
               </a:rPr>
-              <a:t xml:space="preserve">3. </a:t>
+              <a:t>3. </a:t>
             </a:r>
             <a:r>
               <a:rPr lang="zh-CN" altLang="en-US" sz="1500" b="1" dirty="0">
@@ -45175,7 +45247,7 @@
                 <a:latin typeface="+mn-ea"/>
                 <a:sym typeface="等线" panose="02010600030101010101" pitchFamily="2" charset="-122"/>
               </a:rPr>
-              <a:t xml:space="preserve">1. </a:t>
+              <a:t>1. </a:t>
             </a:r>
             <a:r>
               <a:rPr lang="zh-CN" altLang="en-US" sz="1500" b="1" dirty="0">
@@ -45202,7 +45274,7 @@
                 <a:latin typeface="+mn-ea"/>
                 <a:sym typeface="等线" panose="02010600030101010101" pitchFamily="2" charset="-122"/>
               </a:rPr>
-              <a:t xml:space="preserve">2. </a:t>
+              <a:t>2. </a:t>
             </a:r>
             <a:r>
               <a:rPr lang="zh-CN" altLang="en-US" sz="1500" b="1" dirty="0">
@@ -45229,7 +45301,7 @@
                 <a:latin typeface="+mn-ea"/>
                 <a:sym typeface="等线" panose="02010600030101010101" pitchFamily="2" charset="-122"/>
               </a:rPr>
-              <a:t xml:space="preserve">3. </a:t>
+              <a:t>3. </a:t>
             </a:r>
             <a:r>
               <a:rPr lang="zh-CN" altLang="en-US" sz="1500" b="1" dirty="0">
@@ -45311,7 +45383,7 @@
                 <a:latin typeface="+mn-ea"/>
                 <a:sym typeface="等线" panose="02010600030101010101" pitchFamily="2" charset="-122"/>
               </a:rPr>
-              <a:t xml:space="preserve">1. </a:t>
+              <a:t>1. </a:t>
             </a:r>
             <a:r>
               <a:rPr lang="zh-CN" altLang="en-US" sz="1500" b="1" dirty="0">
@@ -45338,7 +45410,7 @@
                 <a:latin typeface="+mn-ea"/>
                 <a:sym typeface="等线" panose="02010600030101010101" pitchFamily="2" charset="-122"/>
               </a:rPr>
-              <a:t xml:space="preserve">2. </a:t>
+              <a:t>2. </a:t>
             </a:r>
             <a:r>
               <a:rPr lang="zh-CN" altLang="en-US" sz="1500" b="1" dirty="0">
@@ -45365,7 +45437,7 @@
                 <a:latin typeface="+mn-ea"/>
                 <a:sym typeface="等线" panose="02010600030101010101" pitchFamily="2" charset="-122"/>
               </a:rPr>
-              <a:t xml:space="preserve">3. </a:t>
+              <a:t>3. </a:t>
             </a:r>
             <a:r>
               <a:rPr lang="zh-CN" altLang="en-US" sz="1500" b="1" dirty="0">
@@ -49959,7 +50031,7 @@
                     <a:cs typeface="Roboto"/>
                     <a:sym typeface="Roboto"/>
                   </a:rPr>
-                  <a:t xml:space="preserve"> </a:t>
+                  <a:t> </a:t>
                 </a:r>
                 <a14:m>
                   <m:oMath xmlns:m="http://schemas.openxmlformats.org/officeDocument/2006/math">
@@ -50018,7 +50090,7 @@
                     <a:cs typeface="Roboto"/>
                     <a:sym typeface="Roboto"/>
                   </a:rPr>
-                  <a:t xml:space="preserve"> 对 </a:t>
+                  <a:t> 对 </a:t>
                 </a:r>
                 <a14:m>
                   <m:oMath xmlns:m="http://schemas.openxmlformats.org/officeDocument/2006/math">
@@ -50136,7 +50208,7 @@
                     <a:cs typeface="Roboto"/>
                     <a:sym typeface="Roboto"/>
                   </a:rPr>
-                  <a:t xml:space="preserve"> </a:t>
+                  <a:t> </a:t>
                 </a:r>
                 <a:r>
                   <a:rPr lang="en-US" sz="1400" b="0" i="0" u="none" strike="noStrike" dirty="0" err="1">
@@ -50160,7 +50232,7 @@
                     <a:cs typeface="Roboto"/>
                     <a:sym typeface="Roboto"/>
                   </a:rPr>
-                  <a:t xml:space="preserve"> </a:t>
+                  <a:t> </a:t>
                 </a:r>
                 <a14:m>
                   <m:oMath xmlns:m="http://schemas.openxmlformats.org/officeDocument/2006/math">
@@ -50219,7 +50291,7 @@
                     <a:cs typeface="Roboto"/>
                     <a:sym typeface="Roboto"/>
                   </a:rPr>
-                  <a:t xml:space="preserve"> </a:t>
+                  <a:t> </a:t>
                 </a:r>
                 <a:r>
                   <a:rPr lang="en-US" sz="1400" b="0" i="0" u="none" strike="noStrike" dirty="0" err="1">
@@ -50243,7 +50315,7 @@
                     <a:cs typeface="Roboto"/>
                     <a:sym typeface="Roboto"/>
                   </a:rPr>
-                  <a:t xml:space="preserve"> </a:t>
+                  <a:t> </a:t>
                 </a:r>
                 <a14:m>
                   <m:oMath xmlns:m="http://schemas.openxmlformats.org/officeDocument/2006/math">
@@ -50302,7 +50374,7 @@
                     <a:cs typeface="Roboto"/>
                     <a:sym typeface="Roboto"/>
                   </a:rPr>
-                  <a:t xml:space="preserve"> </a:t>
+                  <a:t> </a:t>
                 </a:r>
                 <a:r>
                   <a:rPr lang="en-US" sz="1400" b="0" i="0" u="none" strike="noStrike" dirty="0" err="1">
@@ -50326,7 +50398,7 @@
                     <a:cs typeface="Roboto"/>
                     <a:sym typeface="Roboto"/>
                   </a:rPr>
-                  <a:t xml:space="preserve"> </a:t>
+                  <a:t> </a:t>
                 </a:r>
                 <a14:m>
                   <m:oMath xmlns:m="http://schemas.openxmlformats.org/officeDocument/2006/math">
@@ -50385,7 +50457,7 @@
                     <a:cs typeface="Roboto"/>
                     <a:sym typeface="Roboto"/>
                   </a:rPr>
-                  <a:t xml:space="preserve"> </a:t>
+                  <a:t> </a:t>
                 </a:r>
                 <a:r>
                   <a:rPr lang="en-US" sz="1400" b="0" i="0" u="none" strike="noStrike" dirty="0" err="1">
